--- a/GDS_API_Schema_Checker.pptx
+++ b/GDS_API_Schema_Checker.pptx
@@ -1440,8 +1440,8 @@
         </p:nvSpPr>
         <p:spPr>
           <a:xfrm>
-            <a:off x="914400" y="2995613"/>
-            <a:ext cx="9555480" cy="361950"/>
+            <a:off x="914400" y="3013621"/>
+            <a:ext cx="9555480" cy="357188"/>
           </a:xfrm>
           <a:prstGeom prst="rect">
             <a:avLst/>
@@ -1481,24 +1481,24 @@
         </p:nvSpPr>
         <p:spPr>
           <a:xfrm>
-            <a:off x="914400" y="3662362"/>
-            <a:ext cx="8947404" cy="1979414"/>
-          </a:xfrm>
-          <a:prstGeom prst="rect">
-            <a:avLst/>
-          </a:prstGeom>
-          <a:noFill/>
-          <a:ln/>
-        </p:spPr>
-        <p:txBody>
-          <a:bodyPr wrap="square" lIns="25400" tIns="25400" rIns="25400" bIns="25400" rtlCol="0" anchor="t">
-            <a:normAutofit/>
-          </a:bodyPr>
-          <a:lstStyle/>
-          <a:p>
-            <a:pPr algn="l" indent="0" marL="0">
-              <a:lnSpc>
-                <a:spcPct val="86373"/>
+            <a:off x="914400" y="3675608"/>
+            <a:ext cx="8947404" cy="1979563"/>
+          </a:xfrm>
+          <a:prstGeom prst="rect">
+            <a:avLst/>
+          </a:prstGeom>
+          <a:noFill/>
+          <a:ln/>
+        </p:spPr>
+        <p:txBody>
+          <a:bodyPr wrap="square" lIns="25400" tIns="25400" rIns="25400" bIns="25400" rtlCol="0" anchor="t">
+            <a:normAutofit/>
+          </a:bodyPr>
+          <a:lstStyle/>
+          <a:p>
+            <a:pPr algn="l" indent="0" marL="0">
+              <a:lnSpc>
+                <a:spcPct val="86740"/>
               </a:lnSpc>
               <a:buNone/>
             </a:pPr>
@@ -1525,8 +1525,8 @@
         </p:nvSpPr>
         <p:spPr>
           <a:xfrm>
-            <a:off x="914400" y="5946577"/>
-            <a:ext cx="4145502" cy="1992511"/>
+            <a:off x="914400" y="5959971"/>
+            <a:ext cx="4560159" cy="1503908"/>
           </a:xfrm>
           <a:prstGeom prst="rect">
             <a:avLst/>
@@ -1555,7 +1555,7 @@
                 <a:ea typeface="Helvetica Neue" pitchFamily="34" charset="-122"/>
                 <a:cs typeface="Helvetica Neue" pitchFamily="34" charset="-120"/>
               </a:rPr>
-              <a:t>A pre-commit check for the GDS API Standards, with an AI assistant that suggests the fix.</a:t>
+              <a:t>A CLI tool that runs as a pre-commit hook when you're building a GDS API</a:t>
             </a:r>
             <a:endParaRPr lang="en-US" sz="2850" dirty="0"/>
           </a:p>
@@ -1569,8 +1569,49 @@
         </p:nvSpPr>
         <p:spPr>
           <a:xfrm>
-            <a:off x="914400" y="9067800"/>
-            <a:ext cx="9555480" cy="342900"/>
+            <a:off x="914400" y="8610600"/>
+            <a:ext cx="9555480" cy="390525"/>
+          </a:xfrm>
+          <a:prstGeom prst="rect">
+            <a:avLst/>
+          </a:prstGeom>
+          <a:noFill/>
+          <a:ln/>
+        </p:spPr>
+        <p:txBody>
+          <a:bodyPr wrap="square" lIns="25400" tIns="25400" rIns="25400" bIns="25400" rtlCol="0" anchor="t">
+            <a:normAutofit/>
+          </a:bodyPr>
+          <a:lstStyle/>
+          <a:p>
+            <a:pPr algn="l" indent="0" marL="0">
+              <a:buNone/>
+            </a:pPr>
+            <a:r>
+              <a:rPr lang="en-US" sz="2250" b="1" dirty="0">
+                <a:solidFill>
+                  <a:srgbClr val="0B0C0C"/>
+                </a:solidFill>
+                <a:latin typeface="Helvetica Neue" pitchFamily="34" charset="0"/>
+                <a:ea typeface="Helvetica Neue" pitchFamily="34" charset="-122"/>
+                <a:cs typeface="Helvetica Neue" pitchFamily="34" charset="-120"/>
+              </a:rPr>
+              <a:t>Wilson Adenuga · Teemerte Teccola</a:t>
+            </a:r>
+            <a:endParaRPr lang="en-US" sz="2250" dirty="0"/>
+          </a:p>
+        </p:txBody>
+      </p:sp>
+      <p:sp>
+        <p:nvSpPr>
+          <p:cNvPr id="7" name="Text 4"/>
+          <p:cNvSpPr/>
+          <p:nvPr/>
+        </p:nvSpPr>
+        <p:spPr>
+          <a:xfrm>
+            <a:off x="914400" y="9077325"/>
+            <a:ext cx="9555480" cy="333375"/>
           </a:xfrm>
           <a:prstGeom prst="rect">
             <a:avLst/>
@@ -1604,7 +1645,7 @@
       </p:sp>
       <p:sp>
         <p:nvSpPr>
-          <p:cNvPr id="7" name="Shape 4"/>
+          <p:cNvPr id="8" name="Shape 5"/>
           <p:cNvSpPr/>
           <p:nvPr/>
         </p:nvSpPr>
@@ -1624,7 +1665,7 @@
       </p:sp>
       <p:sp>
         <p:nvSpPr>
-          <p:cNvPr id="8" name="Shape 5"/>
+          <p:cNvPr id="9" name="Shape 6"/>
           <p:cNvSpPr/>
           <p:nvPr/>
         </p:nvSpPr>
@@ -1669,7 +1710,7 @@
       </p:sp>
       <p:sp>
         <p:nvSpPr>
-          <p:cNvPr id="9" name="Shape 6"/>
+          <p:cNvPr id="10" name="Shape 7"/>
           <p:cNvSpPr/>
           <p:nvPr/>
         </p:nvSpPr>
@@ -1691,7 +1732,7 @@
       </p:sp>
       <p:sp>
         <p:nvSpPr>
-          <p:cNvPr id="10" name="Shape 7"/>
+          <p:cNvPr id="11" name="Shape 8"/>
           <p:cNvSpPr/>
           <p:nvPr/>
         </p:nvSpPr>
@@ -1737,7 +1778,7 @@
       </p:sp>
       <p:sp>
         <p:nvSpPr>
-          <p:cNvPr id="11" name="Shape 8"/>
+          <p:cNvPr id="12" name="Shape 9"/>
           <p:cNvSpPr/>
           <p:nvPr/>
         </p:nvSpPr>
@@ -1820,7 +1861,7 @@
         </p:nvSpPr>
         <p:spPr>
           <a:xfrm>
-            <a:off x="914400" y="933450"/>
+            <a:off x="914400" y="928688"/>
             <a:ext cx="266700" cy="266700"/>
           </a:xfrm>
           <a:prstGeom prst="roundRect">
@@ -1843,7 +1884,7 @@
         <p:spPr>
           <a:xfrm>
             <a:off x="1409700" y="914400"/>
-            <a:ext cx="1991707" cy="342900"/>
+            <a:ext cx="1991625" cy="333375"/>
           </a:xfrm>
           <a:prstGeom prst="rect">
             <a:avLst/>
@@ -1883,24 +1924,24 @@
         </p:nvSpPr>
         <p:spPr>
           <a:xfrm>
-            <a:off x="914400" y="2738735"/>
-            <a:ext cx="14662319" cy="2171700"/>
-          </a:xfrm>
-          <a:prstGeom prst="rect">
-            <a:avLst/>
-          </a:prstGeom>
-          <a:noFill/>
-          <a:ln/>
-        </p:spPr>
-        <p:txBody>
-          <a:bodyPr wrap="square" lIns="25400" tIns="25400" rIns="25400" bIns="25400" rtlCol="0" anchor="t">
-            <a:normAutofit/>
-          </a:bodyPr>
-          <a:lstStyle/>
-          <a:p>
-            <a:pPr algn="l" indent="0" marL="0">
-              <a:lnSpc>
-                <a:spcPct val="82353"/>
+            <a:off x="914400" y="2311896"/>
+            <a:ext cx="14662396" cy="2171700"/>
+          </a:xfrm>
+          <a:prstGeom prst="rect">
+            <a:avLst/>
+          </a:prstGeom>
+          <a:noFill/>
+          <a:ln/>
+        </p:spPr>
+        <p:txBody>
+          <a:bodyPr wrap="square" lIns="25400" tIns="25400" rIns="25400" bIns="25400" rtlCol="0" anchor="t">
+            <a:normAutofit/>
+          </a:bodyPr>
+          <a:lstStyle/>
+          <a:p>
+            <a:pPr algn="l" indent="0" marL="0">
+              <a:lnSpc>
+                <a:spcPct val="82051"/>
               </a:lnSpc>
               <a:buNone/>
             </a:pPr>
@@ -1927,7 +1968,7 @@
         </p:nvSpPr>
         <p:spPr>
           <a:xfrm>
-            <a:off x="914400" y="6391870"/>
+            <a:off x="914400" y="5547717"/>
             <a:ext cx="16459200" cy="38100"/>
           </a:xfrm>
           <a:prstGeom prst="rect">
@@ -1941,35 +1982,57 @@
       </p:sp>
       <p:sp>
         <p:nvSpPr>
-          <p:cNvPr id="6" name="Text 4"/>
-          <p:cNvSpPr/>
-          <p:nvPr/>
-        </p:nvSpPr>
-        <p:spPr>
-          <a:xfrm>
-            <a:off x="914400" y="6887170"/>
-            <a:ext cx="8084058" cy="2523530"/>
-          </a:xfrm>
-          <a:prstGeom prst="rect">
-            <a:avLst/>
-          </a:prstGeom>
-          <a:noFill/>
-          <a:ln/>
-        </p:spPr>
-        <p:txBody>
-          <a:bodyPr wrap="square" lIns="25400" tIns="25400" rIns="25400" bIns="25400" rtlCol="0" anchor="t">
-            <a:normAutofit/>
-          </a:bodyPr>
-          <a:lstStyle/>
-          <a:p>
-            <a:pPr algn="l" indent="0" marL="0">
-              <a:lnSpc>
-                <a:spcPct val="121395"/>
-              </a:lnSpc>
-              <a:buNone/>
-            </a:pPr>
-            <a:r>
-              <a:rPr lang="en-US" sz="2700" dirty="0">
+          <p:cNvPr id="6" name="Shape 4"/>
+          <p:cNvSpPr/>
+          <p:nvPr/>
+        </p:nvSpPr>
+        <p:spPr>
+          <a:xfrm>
+            <a:off x="914400" y="6195417"/>
+            <a:ext cx="171450" cy="171450"/>
+          </a:xfrm>
+          <a:prstGeom prst="roundRect">
+            <a:avLst>
+              <a:gd name="adj" fmla="val 27778"/>
+            </a:avLst>
+          </a:prstGeom>
+          <a:solidFill>
+            <a:srgbClr val="F499C6"/>
+          </a:solidFill>
+          <a:ln/>
+        </p:spPr>
+      </p:sp>
+      <p:sp>
+        <p:nvSpPr>
+          <p:cNvPr id="7" name="Text 5"/>
+          <p:cNvSpPr/>
+          <p:nvPr/>
+        </p:nvSpPr>
+        <p:spPr>
+          <a:xfrm>
+            <a:off x="1314450" y="6043017"/>
+            <a:ext cx="7672007" cy="944761"/>
+          </a:xfrm>
+          <a:prstGeom prst="rect">
+            <a:avLst/>
+          </a:prstGeom>
+          <a:noFill/>
+          <a:ln/>
+        </p:spPr>
+        <p:txBody>
+          <a:bodyPr wrap="square" lIns="25400" tIns="25400" rIns="25400" bIns="25400" rtlCol="0" anchor="t">
+            <a:normAutofit/>
+          </a:bodyPr>
+          <a:lstStyle/>
+          <a:p>
+            <a:pPr algn="l" indent="0" marL="0">
+              <a:lnSpc>
+                <a:spcPct val="117531"/>
+              </a:lnSpc>
+              <a:buNone/>
+            </a:pPr>
+            <a:r>
+              <a:rPr lang="en-US" sz="2550" dirty="0">
                 <a:solidFill>
                   <a:srgbClr val="0B0C0C"/>
                 </a:solidFill>
@@ -1977,43 +2040,65 @@
                 <a:ea typeface="Helvetica Neue" pitchFamily="34" charset="-122"/>
                 <a:cs typeface="Helvetica Neue" pitchFamily="34" charset="-120"/>
               </a:rPr>
-              <a:t>The GDS API Standards are written as prose, so no computer can check them directly. Compliance ends up being caught at code review, or missed entirely. Every team writes their own version of the checks and they drift apart.</a:t>
-            </a:r>
-            <a:endParaRPr lang="en-US" sz="2700" dirty="0"/>
-          </a:p>
-        </p:txBody>
-      </p:sp>
-      <p:sp>
-        <p:nvSpPr>
-          <p:cNvPr id="7" name="Text 5"/>
-          <p:cNvSpPr/>
-          <p:nvPr/>
-        </p:nvSpPr>
-        <p:spPr>
-          <a:xfrm>
-            <a:off x="9525000" y="6887170"/>
-            <a:ext cx="8084058" cy="2523530"/>
-          </a:xfrm>
-          <a:prstGeom prst="rect">
-            <a:avLst/>
-          </a:prstGeom>
-          <a:noFill/>
-          <a:ln/>
-        </p:spPr>
-        <p:txBody>
-          <a:bodyPr wrap="square" lIns="25400" tIns="25400" rIns="25400" bIns="25400" rtlCol="0" anchor="t">
-            <a:normAutofit/>
-          </a:bodyPr>
-          <a:lstStyle/>
-          <a:p>
-            <a:pPr algn="l" indent="0" marL="0">
-              <a:lnSpc>
-                <a:spcPct val="121395"/>
-              </a:lnSpc>
-              <a:buNone/>
-            </a:pPr>
-            <a:r>
-              <a:rPr lang="en-US" sz="2700" dirty="0">
+              <a:t>The GDS API Standards are written as prose — no computer can check them directly</a:t>
+            </a:r>
+            <a:endParaRPr lang="en-US" sz="2550" dirty="0"/>
+          </a:p>
+        </p:txBody>
+      </p:sp>
+      <p:sp>
+        <p:nvSpPr>
+          <p:cNvPr id="8" name="Shape 6"/>
+          <p:cNvSpPr/>
+          <p:nvPr/>
+        </p:nvSpPr>
+        <p:spPr>
+          <a:xfrm>
+            <a:off x="914400" y="7406878"/>
+            <a:ext cx="171450" cy="171450"/>
+          </a:xfrm>
+          <a:prstGeom prst="roundRect">
+            <a:avLst>
+              <a:gd name="adj" fmla="val 27778"/>
+            </a:avLst>
+          </a:prstGeom>
+          <a:solidFill>
+            <a:srgbClr val="F499C6"/>
+          </a:solidFill>
+          <a:ln/>
+        </p:spPr>
+      </p:sp>
+      <p:sp>
+        <p:nvSpPr>
+          <p:cNvPr id="9" name="Text 7"/>
+          <p:cNvSpPr/>
+          <p:nvPr/>
+        </p:nvSpPr>
+        <p:spPr>
+          <a:xfrm>
+            <a:off x="1314450" y="7254478"/>
+            <a:ext cx="7672007" cy="944761"/>
+          </a:xfrm>
+          <a:prstGeom prst="rect">
+            <a:avLst/>
+          </a:prstGeom>
+          <a:noFill/>
+          <a:ln/>
+        </p:spPr>
+        <p:txBody>
+          <a:bodyPr wrap="square" lIns="25400" tIns="25400" rIns="25400" bIns="25400" rtlCol="0" anchor="t">
+            <a:normAutofit/>
+          </a:bodyPr>
+          <a:lstStyle/>
+          <a:p>
+            <a:pPr algn="l" indent="0" marL="0">
+              <a:lnSpc>
+                <a:spcPct val="117531"/>
+              </a:lnSpc>
+              <a:buNone/>
+            </a:pPr>
+            <a:r>
+              <a:rPr lang="en-US" sz="2550" dirty="0">
                 <a:solidFill>
                   <a:srgbClr val="0B0C0C"/>
                 </a:solidFill>
@@ -2021,29 +2106,265 @@
                 <a:ea typeface="Helvetica Neue" pitchFamily="34" charset="-122"/>
                 <a:cs typeface="Helvetica Neue" pitchFamily="34" charset="-120"/>
               </a:rPr>
-              <a:t>It matters more than it used to. AI agents now read OpenAPI specs directly to work out how to call an API. </a:t>
-            </a:r>
-            <a:pPr algn="l" indent="0" marL="0">
-              <a:lnSpc>
-                <a:spcPct val="121395"/>
-              </a:lnSpc>
-              <a:buNone/>
-            </a:pPr>
-            <a:r>
-              <a:rPr lang="en-US" sz="2700" b="1" dirty="0">
+              <a:t>Compliance gets caught at code review, or missed entirely</a:t>
+            </a:r>
+            <a:endParaRPr lang="en-US" sz="2550" dirty="0"/>
+          </a:p>
+        </p:txBody>
+      </p:sp>
+      <p:sp>
+        <p:nvSpPr>
+          <p:cNvPr id="10" name="Shape 8"/>
+          <p:cNvSpPr/>
+          <p:nvPr/>
+        </p:nvSpPr>
+        <p:spPr>
+          <a:xfrm>
+            <a:off x="914400" y="8618339"/>
+            <a:ext cx="171450" cy="171450"/>
+          </a:xfrm>
+          <a:prstGeom prst="roundRect">
+            <a:avLst>
+              <a:gd name="adj" fmla="val 27778"/>
+            </a:avLst>
+          </a:prstGeom>
+          <a:solidFill>
+            <a:srgbClr val="F499C6"/>
+          </a:solidFill>
+          <a:ln/>
+        </p:spPr>
+      </p:sp>
+      <p:sp>
+        <p:nvSpPr>
+          <p:cNvPr id="11" name="Text 9"/>
+          <p:cNvSpPr/>
+          <p:nvPr/>
+        </p:nvSpPr>
+        <p:spPr>
+          <a:xfrm>
+            <a:off x="1314450" y="8465939"/>
+            <a:ext cx="7672007" cy="944761"/>
+          </a:xfrm>
+          <a:prstGeom prst="rect">
+            <a:avLst/>
+          </a:prstGeom>
+          <a:noFill/>
+          <a:ln/>
+        </p:spPr>
+        <p:txBody>
+          <a:bodyPr wrap="square" lIns="25400" tIns="25400" rIns="25400" bIns="25400" rtlCol="0" anchor="t">
+            <a:normAutofit/>
+          </a:bodyPr>
+          <a:lstStyle/>
+          <a:p>
+            <a:pPr algn="l" indent="0" marL="0">
+              <a:lnSpc>
+                <a:spcPct val="117531"/>
+              </a:lnSpc>
+              <a:buNone/>
+            </a:pPr>
+            <a:r>
+              <a:rPr lang="en-US" sz="2550" dirty="0">
                 <a:solidFill>
                   <a:srgbClr val="0B0C0C"/>
                 </a:solidFill>
-                <a:highlight>
-                  <a:srgbClr val="FFDD00"/>
-                </a:highlight>
                 <a:latin typeface="Helvetica Neue" pitchFamily="34" charset="0"/>
                 <a:ea typeface="Helvetica Neue" pitchFamily="34" charset="-122"/>
                 <a:cs typeface="Helvetica Neue" pitchFamily="34" charset="-120"/>
               </a:rPr>
-              <a:t>When the spec is off, it isn't just a review nit; the agent gives up.</a:t>
-            </a:r>
-            <a:endParaRPr lang="en-US" sz="2700" dirty="0"/>
+              <a:t>Every team writes its own version of the checks, and they drift apart</a:t>
+            </a:r>
+            <a:endParaRPr lang="en-US" sz="2550" dirty="0"/>
+          </a:p>
+        </p:txBody>
+      </p:sp>
+      <p:sp>
+        <p:nvSpPr>
+          <p:cNvPr id="12" name="Text 10"/>
+          <p:cNvSpPr/>
+          <p:nvPr/>
+        </p:nvSpPr>
+        <p:spPr>
+          <a:xfrm>
+            <a:off x="9525000" y="6043017"/>
+            <a:ext cx="8633460" cy="433388"/>
+          </a:xfrm>
+          <a:prstGeom prst="rect">
+            <a:avLst/>
+          </a:prstGeom>
+          <a:noFill/>
+          <a:ln/>
+        </p:spPr>
+        <p:txBody>
+          <a:bodyPr wrap="square" lIns="25400" tIns="25400" rIns="25400" bIns="25400" rtlCol="0" anchor="t">
+            <a:normAutofit/>
+          </a:bodyPr>
+          <a:lstStyle/>
+          <a:p>
+            <a:pPr algn="l" indent="0" marL="0">
+              <a:buNone/>
+            </a:pPr>
+            <a:r>
+              <a:rPr lang="en-US" sz="2550" b="1" dirty="0">
+                <a:solidFill>
+                  <a:srgbClr val="0B0C0C"/>
+                </a:solidFill>
+                <a:latin typeface="Helvetica Neue" pitchFamily="34" charset="0"/>
+                <a:ea typeface="Helvetica Neue" pitchFamily="34" charset="-122"/>
+                <a:cs typeface="Helvetica Neue" pitchFamily="34" charset="-120"/>
+              </a:rPr>
+              <a:t>It matters more than it used to:</a:t>
+            </a:r>
+            <a:endParaRPr lang="en-US" sz="2550" dirty="0"/>
+          </a:p>
+        </p:txBody>
+      </p:sp>
+      <p:sp>
+        <p:nvSpPr>
+          <p:cNvPr id="13" name="Shape 11"/>
+          <p:cNvSpPr/>
+          <p:nvPr/>
+        </p:nvSpPr>
+        <p:spPr>
+          <a:xfrm>
+            <a:off x="9525000" y="6895505"/>
+            <a:ext cx="171450" cy="171450"/>
+          </a:xfrm>
+          <a:prstGeom prst="roundRect">
+            <a:avLst>
+              <a:gd name="adj" fmla="val 27778"/>
+            </a:avLst>
+          </a:prstGeom>
+          <a:solidFill>
+            <a:srgbClr val="FFDD00"/>
+          </a:solidFill>
+          <a:ln/>
+        </p:spPr>
+      </p:sp>
+      <p:sp>
+        <p:nvSpPr>
+          <p:cNvPr id="14" name="Text 12"/>
+          <p:cNvSpPr/>
+          <p:nvPr/>
+        </p:nvSpPr>
+        <p:spPr>
+          <a:xfrm>
+            <a:off x="9925050" y="6743105"/>
+            <a:ext cx="7672007" cy="944761"/>
+          </a:xfrm>
+          <a:prstGeom prst="rect">
+            <a:avLst/>
+          </a:prstGeom>
+          <a:noFill/>
+          <a:ln/>
+        </p:spPr>
+        <p:txBody>
+          <a:bodyPr wrap="square" lIns="25400" tIns="25400" rIns="25400" bIns="25400" rtlCol="0" anchor="t">
+            <a:normAutofit/>
+          </a:bodyPr>
+          <a:lstStyle/>
+          <a:p>
+            <a:pPr algn="l" indent="0" marL="0">
+              <a:lnSpc>
+                <a:spcPct val="117531"/>
+              </a:lnSpc>
+              <a:buNone/>
+            </a:pPr>
+            <a:r>
+              <a:rPr lang="en-US" sz="2550" dirty="0">
+                <a:solidFill>
+                  <a:srgbClr val="0B0C0C"/>
+                </a:solidFill>
+                <a:latin typeface="Helvetica Neue" pitchFamily="34" charset="0"/>
+                <a:ea typeface="Helvetica Neue" pitchFamily="34" charset="-122"/>
+                <a:cs typeface="Helvetica Neue" pitchFamily="34" charset="-120"/>
+              </a:rPr>
+              <a:t>AI agents now read OpenAPI specs directly to work out how to call an API</a:t>
+            </a:r>
+            <a:endParaRPr lang="en-US" sz="2550" dirty="0"/>
+          </a:p>
+        </p:txBody>
+      </p:sp>
+      <p:sp>
+        <p:nvSpPr>
+          <p:cNvPr id="15" name="Shape 13"/>
+          <p:cNvSpPr/>
+          <p:nvPr/>
+        </p:nvSpPr>
+        <p:spPr>
+          <a:xfrm>
+            <a:off x="9525000" y="8106966"/>
+            <a:ext cx="171450" cy="171450"/>
+          </a:xfrm>
+          <a:prstGeom prst="roundRect">
+            <a:avLst>
+              <a:gd name="adj" fmla="val 27778"/>
+            </a:avLst>
+          </a:prstGeom>
+          <a:solidFill>
+            <a:srgbClr val="FFDD00"/>
+          </a:solidFill>
+          <a:ln/>
+        </p:spPr>
+      </p:sp>
+      <p:sp>
+        <p:nvSpPr>
+          <p:cNvPr id="16" name="Text 14"/>
+          <p:cNvSpPr/>
+          <p:nvPr/>
+        </p:nvSpPr>
+        <p:spPr>
+          <a:xfrm>
+            <a:off x="9925050" y="7954566"/>
+            <a:ext cx="7672007" cy="944761"/>
+          </a:xfrm>
+          <a:prstGeom prst="rect">
+            <a:avLst/>
+          </a:prstGeom>
+          <a:noFill/>
+          <a:ln/>
+        </p:spPr>
+        <p:txBody>
+          <a:bodyPr wrap="square" lIns="25400" tIns="25400" rIns="25400" bIns="25400" rtlCol="0" anchor="t">
+            <a:normAutofit/>
+          </a:bodyPr>
+          <a:lstStyle/>
+          <a:p>
+            <a:pPr algn="l" indent="0" marL="0">
+              <a:lnSpc>
+                <a:spcPct val="117531"/>
+              </a:lnSpc>
+              <a:buNone/>
+            </a:pPr>
+            <a:r>
+              <a:rPr lang="en-US" sz="2550" dirty="0">
+                <a:solidFill>
+                  <a:srgbClr val="0B0C0C"/>
+                </a:solidFill>
+                <a:latin typeface="Helvetica Neue" pitchFamily="34" charset="0"/>
+                <a:ea typeface="Helvetica Neue" pitchFamily="34" charset="-122"/>
+                <a:cs typeface="Helvetica Neue" pitchFamily="34" charset="-120"/>
+              </a:rPr>
+              <a:t>When the spec is off, it isn't a review nit — </a:t>
+            </a:r>
+            <a:pPr algn="l" indent="0" marL="0">
+              <a:lnSpc>
+                <a:spcPct val="117531"/>
+              </a:lnSpc>
+              <a:buNone/>
+            </a:pPr>
+            <a:r>
+              <a:rPr lang="en-US" sz="2550" b="1" dirty="0">
+                <a:solidFill>
+                  <a:srgbClr val="0B0C0C"/>
+                </a:solidFill>
+                <a:latin typeface="Helvetica Neue" pitchFamily="34" charset="0"/>
+                <a:ea typeface="Helvetica Neue" pitchFamily="34" charset="-122"/>
+                <a:cs typeface="Helvetica Neue" pitchFamily="34" charset="-120"/>
+              </a:rPr>
+              <a:t>the agent gives up</a:t>
+            </a:r>
+            <a:endParaRPr lang="en-US" sz="2550" dirty="0"/>
           </a:p>
         </p:txBody>
       </p:sp>
@@ -2087,7 +2408,7 @@
         </p:nvSpPr>
         <p:spPr>
           <a:xfrm>
-            <a:off x="914400" y="933450"/>
+            <a:off x="914400" y="928688"/>
             <a:ext cx="266700" cy="266700"/>
           </a:xfrm>
           <a:prstGeom prst="roundRect">
@@ -2110,7 +2431,7 @@
         <p:spPr>
           <a:xfrm>
             <a:off x="1409700" y="914400"/>
-            <a:ext cx="2353672" cy="342900"/>
+            <a:ext cx="2353672" cy="333375"/>
           </a:xfrm>
           <a:prstGeom prst="rect">
             <a:avLst/>
@@ -2150,29 +2471,29 @@
         </p:nvSpPr>
         <p:spPr>
           <a:xfrm>
-            <a:off x="914400" y="2608064"/>
-            <a:ext cx="8084058" cy="1529060"/>
-          </a:xfrm>
-          <a:prstGeom prst="rect">
-            <a:avLst/>
-          </a:prstGeom>
-          <a:noFill/>
-          <a:ln/>
-        </p:spPr>
-        <p:txBody>
-          <a:bodyPr wrap="square" lIns="25400" tIns="25400" rIns="25400" bIns="25400" rtlCol="0" anchor="t">
-            <a:normAutofit/>
-          </a:bodyPr>
-          <a:lstStyle/>
-          <a:p>
-            <a:pPr algn="l" indent="0" marL="0">
-              <a:lnSpc>
-                <a:spcPct val="85087"/>
-              </a:lnSpc>
-              <a:buNone/>
-            </a:pPr>
-            <a:r>
-              <a:rPr lang="en-US" sz="5700" b="1" spc="-142" kern="0" dirty="0">
+            <a:off x="914400" y="1628775"/>
+            <a:ext cx="18105120" cy="854199"/>
+          </a:xfrm>
+          <a:prstGeom prst="rect">
+            <a:avLst/>
+          </a:prstGeom>
+          <a:noFill/>
+          <a:ln/>
+        </p:spPr>
+        <p:txBody>
+          <a:bodyPr wrap="square" lIns="25400" tIns="25400" rIns="25400" bIns="25400" rtlCol="0" anchor="t">
+            <a:normAutofit/>
+          </a:bodyPr>
+          <a:lstStyle/>
+          <a:p>
+            <a:pPr algn="l" indent="0" marL="0">
+              <a:lnSpc>
+                <a:spcPct val="83590"/>
+              </a:lnSpc>
+              <a:buNone/>
+            </a:pPr>
+            <a:r>
+              <a:rPr lang="en-US" sz="6300" b="1" spc="-189" kern="0" dirty="0">
                 <a:solidFill>
                   <a:srgbClr val="0B0C0C"/>
                 </a:solidFill>
@@ -2182,7 +2503,7 @@
               </a:rPr>
               <a:t>One command, before you commit.</a:t>
             </a:r>
-            <a:endParaRPr lang="en-US" sz="5700" dirty="0"/>
+            <a:endParaRPr lang="en-US" sz="6300" dirty="0"/>
           </a:p>
         </p:txBody>
       </p:sp>
@@ -2194,16 +2515,16 @@
         </p:nvSpPr>
         <p:spPr>
           <a:xfrm>
-            <a:off x="914400" y="5487888"/>
-            <a:ext cx="7848600" cy="1666875"/>
+            <a:off x="914400" y="3130674"/>
+            <a:ext cx="190500" cy="190500"/>
           </a:xfrm>
           <a:prstGeom prst="roundRect">
             <a:avLst>
-              <a:gd name="adj" fmla="val 11429"/>
+              <a:gd name="adj" fmla="val 30000"/>
             </a:avLst>
           </a:prstGeom>
           <a:solidFill>
-            <a:srgbClr val="0B0C0C"/>
+            <a:srgbClr val="B1CC33"/>
           </a:solidFill>
           <a:ln/>
         </p:spPr>
@@ -2216,666 +2537,515 @@
         </p:nvSpPr>
         <p:spPr>
           <a:xfrm>
-            <a:off x="1333500" y="5868888"/>
-            <a:ext cx="7711440" cy="381000"/>
-          </a:xfrm>
-          <a:prstGeom prst="rect">
-            <a:avLst/>
-          </a:prstGeom>
-          <a:noFill/>
-          <a:ln/>
-        </p:spPr>
-        <p:txBody>
-          <a:bodyPr wrap="square" lIns="25400" tIns="25400" rIns="25400" bIns="25400" rtlCol="0" anchor="t">
-            <a:normAutofit/>
-          </a:bodyPr>
-          <a:lstStyle/>
-          <a:p>
-            <a:pPr algn="l" indent="0" marL="0">
-              <a:lnSpc>
-                <a:spcPct val="133333"/>
-              </a:lnSpc>
-              <a:buNone/>
-            </a:pPr>
-            <a:r>
-              <a:rPr lang="en-US" sz="1800" dirty="0">
-                <a:solidFill>
-                  <a:srgbClr val="6B6F6F"/>
+            <a:off x="1371600" y="2978274"/>
+            <a:ext cx="11152071" cy="491430"/>
+          </a:xfrm>
+          <a:prstGeom prst="rect">
+            <a:avLst/>
+          </a:prstGeom>
+          <a:noFill/>
+          <a:ln/>
+        </p:spPr>
+        <p:txBody>
+          <a:bodyPr wrap="square" lIns="25400" tIns="25400" rIns="25400" bIns="25400" rtlCol="0" anchor="t">
+            <a:normAutofit/>
+          </a:bodyPr>
+          <a:lstStyle/>
+          <a:p>
+            <a:pPr algn="l" indent="0" marL="0">
+              <a:lnSpc>
+                <a:spcPct val="117531"/>
+              </a:lnSpc>
+              <a:buNone/>
+            </a:pPr>
+            <a:r>
+              <a:rPr lang="en-US" sz="2550" dirty="0">
+                <a:solidFill>
+                  <a:srgbClr val="0B0C0C"/>
+                </a:solidFill>
+                <a:latin typeface="Helvetica Neue" pitchFamily="34" charset="0"/>
+                <a:ea typeface="Helvetica Neue" pitchFamily="34" charset="-122"/>
+                <a:cs typeface="Helvetica Neue" pitchFamily="34" charset="-120"/>
+              </a:rPr>
+              <a:t>Parses the spec and checks it against the </a:t>
+            </a:r>
+            <a:pPr algn="l" indent="0" marL="0">
+              <a:lnSpc>
+                <a:spcPct val="117531"/>
+              </a:lnSpc>
+              <a:buNone/>
+            </a:pPr>
+            <a:r>
+              <a:rPr lang="en-US" sz="2550" b="1" dirty="0">
+                <a:solidFill>
+                  <a:srgbClr val="0B0C0C"/>
+                </a:solidFill>
+                <a:latin typeface="Helvetica Neue" pitchFamily="34" charset="0"/>
+                <a:ea typeface="Helvetica Neue" pitchFamily="34" charset="-122"/>
+                <a:cs typeface="Helvetica Neue" pitchFamily="34" charset="-120"/>
+              </a:rPr>
+              <a:t>GDS and NCSC standards</a:t>
+            </a:r>
+            <a:endParaRPr lang="en-US" sz="2550" dirty="0"/>
+          </a:p>
+        </p:txBody>
+      </p:sp>
+      <p:sp>
+        <p:nvSpPr>
+          <p:cNvPr id="7" name="Shape 5"/>
+          <p:cNvSpPr/>
+          <p:nvPr/>
+        </p:nvSpPr>
+        <p:spPr>
+          <a:xfrm>
+            <a:off x="914400" y="3907854"/>
+            <a:ext cx="190500" cy="190500"/>
+          </a:xfrm>
+          <a:prstGeom prst="roundRect">
+            <a:avLst>
+              <a:gd name="adj" fmla="val 30000"/>
+            </a:avLst>
+          </a:prstGeom>
+          <a:solidFill>
+            <a:srgbClr val="B1CC33"/>
+          </a:solidFill>
+          <a:ln/>
+        </p:spPr>
+      </p:sp>
+      <p:sp>
+        <p:nvSpPr>
+          <p:cNvPr id="8" name="Text 6"/>
+          <p:cNvSpPr/>
+          <p:nvPr/>
+        </p:nvSpPr>
+        <p:spPr>
+          <a:xfrm>
+            <a:off x="1371600" y="3755454"/>
+            <a:ext cx="9468140" cy="491430"/>
+          </a:xfrm>
+          <a:prstGeom prst="rect">
+            <a:avLst/>
+          </a:prstGeom>
+          <a:noFill/>
+          <a:ln/>
+        </p:spPr>
+        <p:txBody>
+          <a:bodyPr wrap="square" lIns="25400" tIns="25400" rIns="25400" bIns="25400" rtlCol="0" anchor="t">
+            <a:normAutofit/>
+          </a:bodyPr>
+          <a:lstStyle/>
+          <a:p>
+            <a:pPr algn="l" indent="0" marL="0">
+              <a:lnSpc>
+                <a:spcPct val="117531"/>
+              </a:lnSpc>
+              <a:buNone/>
+            </a:pPr>
+            <a:r>
+              <a:rPr lang="en-US" sz="2550" dirty="0">
+                <a:solidFill>
+                  <a:srgbClr val="0B0C0C"/>
+                </a:solidFill>
+                <a:latin typeface="Helvetica Neue" pitchFamily="34" charset="0"/>
+                <a:ea typeface="Helvetica Neue" pitchFamily="34" charset="-122"/>
+                <a:cs typeface="Helvetica Neue" pitchFamily="34" charset="-120"/>
+              </a:rPr>
+              <a:t>Prints each issue alongside the </a:t>
+            </a:r>
+            <a:pPr algn="l" indent="0" marL="0">
+              <a:lnSpc>
+                <a:spcPct val="117531"/>
+              </a:lnSpc>
+              <a:buNone/>
+            </a:pPr>
+            <a:r>
+              <a:rPr lang="en-US" sz="2550" b="1" dirty="0">
+                <a:solidFill>
+                  <a:srgbClr val="0B0C0C"/>
+                </a:solidFill>
+                <a:latin typeface="Helvetica Neue" pitchFamily="34" charset="0"/>
+                <a:ea typeface="Helvetica Neue" pitchFamily="34" charset="-122"/>
+                <a:cs typeface="Helvetica Neue" pitchFamily="34" charset="-120"/>
+              </a:rPr>
+              <a:t>exact clause </a:t>
+            </a:r>
+            <a:pPr algn="l" indent="0" marL="0">
+              <a:lnSpc>
+                <a:spcPct val="117531"/>
+              </a:lnSpc>
+              <a:buNone/>
+            </a:pPr>
+            <a:r>
+              <a:rPr lang="en-US" sz="2550" dirty="0">
+                <a:solidFill>
+                  <a:srgbClr val="0B0C0C"/>
+                </a:solidFill>
+                <a:latin typeface="Helvetica Neue" pitchFamily="34" charset="0"/>
+                <a:ea typeface="Helvetica Neue" pitchFamily="34" charset="-122"/>
+                <a:cs typeface="Helvetica Neue" pitchFamily="34" charset="-120"/>
+              </a:rPr>
+              <a:t>it comes from</a:t>
+            </a:r>
+            <a:endParaRPr lang="en-US" sz="2550" dirty="0"/>
+          </a:p>
+        </p:txBody>
+      </p:sp>
+      <p:sp>
+        <p:nvSpPr>
+          <p:cNvPr id="9" name="Shape 7"/>
+          <p:cNvSpPr/>
+          <p:nvPr/>
+        </p:nvSpPr>
+        <p:spPr>
+          <a:xfrm>
+            <a:off x="914400" y="4685035"/>
+            <a:ext cx="190500" cy="190500"/>
+          </a:xfrm>
+          <a:prstGeom prst="roundRect">
+            <a:avLst>
+              <a:gd name="adj" fmla="val 30000"/>
+            </a:avLst>
+          </a:prstGeom>
+          <a:solidFill>
+            <a:srgbClr val="FFDD00"/>
+          </a:solidFill>
+          <a:ln/>
+        </p:spPr>
+      </p:sp>
+      <p:sp>
+        <p:nvSpPr>
+          <p:cNvPr id="10" name="Text 8"/>
+          <p:cNvSpPr/>
+          <p:nvPr/>
+        </p:nvSpPr>
+        <p:spPr>
+          <a:xfrm>
+            <a:off x="1371600" y="4532635"/>
+            <a:ext cx="9956817" cy="491430"/>
+          </a:xfrm>
+          <a:prstGeom prst="rect">
+            <a:avLst/>
+          </a:prstGeom>
+          <a:noFill/>
+          <a:ln/>
+        </p:spPr>
+        <p:txBody>
+          <a:bodyPr wrap="square" lIns="25400" tIns="25400" rIns="25400" bIns="25400" rtlCol="0" anchor="t">
+            <a:normAutofit/>
+          </a:bodyPr>
+          <a:lstStyle/>
+          <a:p>
+            <a:pPr algn="l" indent="0" marL="0">
+              <a:lnSpc>
+                <a:spcPct val="117531"/>
+              </a:lnSpc>
+              <a:buNone/>
+            </a:pPr>
+            <a:r>
+              <a:rPr lang="en-US" sz="2550" dirty="0">
+                <a:solidFill>
+                  <a:srgbClr val="0B0C0C"/>
+                </a:solidFill>
+                <a:latin typeface="Helvetica Neue" pitchFamily="34" charset="0"/>
+                <a:ea typeface="Helvetica Neue" pitchFamily="34" charset="-122"/>
+                <a:cs typeface="Helvetica Neue" pitchFamily="34" charset="-120"/>
+              </a:rPr>
+              <a:t>Where judgement is needed, </a:t>
+            </a:r>
+            <a:pPr algn="l" indent="0" marL="0">
+              <a:lnSpc>
+                <a:spcPct val="117531"/>
+              </a:lnSpc>
+              <a:buNone/>
+            </a:pPr>
+            <a:r>
+              <a:rPr lang="en-US" sz="2550" b="1" dirty="0">
+                <a:solidFill>
+                  <a:srgbClr val="0B0C0C"/>
+                </a:solidFill>
+                <a:latin typeface="Helvetica Neue" pitchFamily="34" charset="0"/>
+                <a:ea typeface="Helvetica Neue" pitchFamily="34" charset="-122"/>
+                <a:cs typeface="Helvetica Neue" pitchFamily="34" charset="-120"/>
+              </a:rPr>
+              <a:t>Claude proposes a concrete fix</a:t>
+            </a:r>
+            <a:endParaRPr lang="en-US" sz="2550" dirty="0"/>
+          </a:p>
+        </p:txBody>
+      </p:sp>
+      <p:sp>
+        <p:nvSpPr>
+          <p:cNvPr id="11" name="Shape 9"/>
+          <p:cNvSpPr/>
+          <p:nvPr/>
+        </p:nvSpPr>
+        <p:spPr>
+          <a:xfrm>
+            <a:off x="914400" y="5462215"/>
+            <a:ext cx="190500" cy="190500"/>
+          </a:xfrm>
+          <a:prstGeom prst="roundRect">
+            <a:avLst>
+              <a:gd name="adj" fmla="val 30000"/>
+            </a:avLst>
+          </a:prstGeom>
+          <a:solidFill>
+            <a:srgbClr val="FFDD00"/>
+          </a:solidFill>
+          <a:ln/>
+        </p:spPr>
+      </p:sp>
+      <p:sp>
+        <p:nvSpPr>
+          <p:cNvPr id="12" name="Text 10"/>
+          <p:cNvSpPr/>
+          <p:nvPr/>
+        </p:nvSpPr>
+        <p:spPr>
+          <a:xfrm>
+            <a:off x="1371600" y="5309815"/>
+            <a:ext cx="13080668" cy="491430"/>
+          </a:xfrm>
+          <a:prstGeom prst="rect">
+            <a:avLst/>
+          </a:prstGeom>
+          <a:noFill/>
+          <a:ln/>
+        </p:spPr>
+        <p:txBody>
+          <a:bodyPr wrap="square" lIns="25400" tIns="25400" rIns="25400" bIns="25400" rtlCol="0" anchor="t">
+            <a:normAutofit/>
+          </a:bodyPr>
+          <a:lstStyle/>
+          <a:p>
+            <a:pPr algn="l" indent="0" marL="0">
+              <a:lnSpc>
+                <a:spcPct val="117531"/>
+              </a:lnSpc>
+              <a:buNone/>
+            </a:pPr>
+            <a:r>
+              <a:rPr lang="en-US" sz="2550" dirty="0">
+                <a:solidFill>
+                  <a:srgbClr val="0B0C0C"/>
+                </a:solidFill>
+                <a:latin typeface="Helvetica Neue" pitchFamily="34" charset="0"/>
+                <a:ea typeface="Helvetica Neue" pitchFamily="34" charset="-122"/>
+                <a:cs typeface="Helvetica Neue" pitchFamily="34" charset="-120"/>
+              </a:rPr>
+              <a:t>The developer walks the findings one at a time — </a:t>
+            </a:r>
+            <a:pPr algn="l" indent="0" marL="0">
+              <a:lnSpc>
+                <a:spcPct val="117531"/>
+              </a:lnSpc>
+              <a:buNone/>
+            </a:pPr>
+            <a:r>
+              <a:rPr lang="en-US" sz="2550" dirty="0">
+                <a:solidFill>
+                  <a:srgbClr val="0B0C0C"/>
                 </a:solidFill>
                 <a:latin typeface="Courier New" pitchFamily="34" charset="0"/>
                 <a:ea typeface="Courier New" pitchFamily="34" charset="-122"/>
                 <a:cs typeface="Courier New" pitchFamily="34" charset="-120"/>
               </a:rPr>
-              <a:t>terminal</a:t>
-            </a:r>
-            <a:endParaRPr lang="en-US" sz="1800" dirty="0"/>
-          </a:p>
-        </p:txBody>
-      </p:sp>
-      <p:sp>
-        <p:nvSpPr>
-          <p:cNvPr id="7" name="Text 5"/>
-          <p:cNvSpPr/>
-          <p:nvPr/>
-        </p:nvSpPr>
-        <p:spPr>
-          <a:xfrm>
-            <a:off x="1333500" y="6345138"/>
-            <a:ext cx="7711440" cy="466725"/>
-          </a:xfrm>
-          <a:prstGeom prst="rect">
-            <a:avLst/>
-          </a:prstGeom>
-          <a:noFill/>
-          <a:ln/>
-        </p:spPr>
-        <p:txBody>
-          <a:bodyPr wrap="square" lIns="25400" tIns="25400" rIns="25400" bIns="25400" rtlCol="0" anchor="t">
-            <a:normAutofit/>
-          </a:bodyPr>
-          <a:lstStyle/>
-          <a:p>
-            <a:pPr algn="l" indent="0" marL="0">
-              <a:lnSpc>
-                <a:spcPct val="132353"/>
-              </a:lnSpc>
-              <a:buNone/>
-            </a:pPr>
-            <a:r>
-              <a:rPr lang="en-US" sz="2250" dirty="0">
-                <a:solidFill>
-                  <a:srgbClr val="B1CC33"/>
+              <a:t>accept, skip, edit, quit</a:t>
+            </a:r>
+            <a:endParaRPr lang="en-US" sz="2550" dirty="0"/>
+          </a:p>
+        </p:txBody>
+      </p:sp>
+      <p:sp>
+        <p:nvSpPr>
+          <p:cNvPr id="13" name="Shape 11"/>
+          <p:cNvSpPr/>
+          <p:nvPr/>
+        </p:nvSpPr>
+        <p:spPr>
+          <a:xfrm>
+            <a:off x="914400" y="6239396"/>
+            <a:ext cx="190500" cy="190500"/>
+          </a:xfrm>
+          <a:prstGeom prst="roundRect">
+            <a:avLst>
+              <a:gd name="adj" fmla="val 30000"/>
+            </a:avLst>
+          </a:prstGeom>
+          <a:solidFill>
+            <a:srgbClr val="F499C6"/>
+          </a:solidFill>
+          <a:ln/>
+        </p:spPr>
+      </p:sp>
+      <p:sp>
+        <p:nvSpPr>
+          <p:cNvPr id="14" name="Text 12"/>
+          <p:cNvSpPr/>
+          <p:nvPr/>
+        </p:nvSpPr>
+        <p:spPr>
+          <a:xfrm>
+            <a:off x="1371600" y="6086996"/>
+            <a:ext cx="12245005" cy="491430"/>
+          </a:xfrm>
+          <a:prstGeom prst="rect">
+            <a:avLst/>
+          </a:prstGeom>
+          <a:noFill/>
+          <a:ln/>
+        </p:spPr>
+        <p:txBody>
+          <a:bodyPr wrap="square" lIns="25400" tIns="25400" rIns="25400" bIns="25400" rtlCol="0" anchor="t">
+            <a:normAutofit/>
+          </a:bodyPr>
+          <a:lstStyle/>
+          <a:p>
+            <a:pPr algn="l" indent="0" marL="0">
+              <a:lnSpc>
+                <a:spcPct val="117531"/>
+              </a:lnSpc>
+              <a:buNone/>
+            </a:pPr>
+            <a:r>
+              <a:rPr lang="en-US" sz="2550" dirty="0">
+                <a:solidFill>
+                  <a:srgbClr val="0B0C0C"/>
+                </a:solidFill>
+                <a:latin typeface="Helvetica Neue" pitchFamily="34" charset="0"/>
+                <a:ea typeface="Helvetica Neue" pitchFamily="34" charset="-122"/>
+                <a:cs typeface="Helvetica Neue" pitchFamily="34" charset="-120"/>
+              </a:rPr>
+              <a:t>Nothing is written to disk without an explicit yes, and a </a:t>
+            </a:r>
+            <a:pPr algn="l" indent="0" marL="0">
+              <a:lnSpc>
+                <a:spcPct val="117531"/>
+              </a:lnSpc>
+              <a:buNone/>
+            </a:pPr>
+            <a:r>
+              <a:rPr lang="en-US" sz="2550" b="1" dirty="0">
+                <a:solidFill>
+                  <a:srgbClr val="0B0C0C"/>
+                </a:solidFill>
+                <a:latin typeface="Helvetica Neue" pitchFamily="34" charset="0"/>
+                <a:ea typeface="Helvetica Neue" pitchFamily="34" charset="-122"/>
+                <a:cs typeface="Helvetica Neue" pitchFamily="34" charset="-120"/>
+              </a:rPr>
+              <a:t>backup is taken first</a:t>
+            </a:r>
+            <a:endParaRPr lang="en-US" sz="2550" dirty="0"/>
+          </a:p>
+        </p:txBody>
+      </p:sp>
+      <p:sp>
+        <p:nvSpPr>
+          <p:cNvPr id="15" name="Shape 13"/>
+          <p:cNvSpPr/>
+          <p:nvPr/>
+        </p:nvSpPr>
+        <p:spPr>
+          <a:xfrm>
+            <a:off x="914400" y="7188026"/>
+            <a:ext cx="16459200" cy="1897261"/>
+          </a:xfrm>
+          <a:prstGeom prst="roundRect">
+            <a:avLst>
+              <a:gd name="adj" fmla="val 12049"/>
+            </a:avLst>
+          </a:prstGeom>
+          <a:solidFill>
+            <a:srgbClr val="0B0C0C"/>
+          </a:solidFill>
+          <a:ln/>
+        </p:spPr>
+      </p:sp>
+      <p:sp>
+        <p:nvSpPr>
+          <p:cNvPr id="16" name="Text 14"/>
+          <p:cNvSpPr/>
+          <p:nvPr/>
+        </p:nvSpPr>
+        <p:spPr>
+          <a:xfrm>
+            <a:off x="1447800" y="7607126"/>
+            <a:ext cx="16931640" cy="358080"/>
+          </a:xfrm>
+          <a:prstGeom prst="rect">
+            <a:avLst/>
+          </a:prstGeom>
+          <a:noFill/>
+          <a:ln/>
+        </p:spPr>
+        <p:txBody>
+          <a:bodyPr wrap="square" lIns="25400" tIns="25400" rIns="25400" bIns="25400" rtlCol="0" anchor="t">
+            <a:normAutofit/>
+          </a:bodyPr>
+          <a:lstStyle/>
+          <a:p>
+            <a:pPr algn="l" indent="0" marL="0">
+              <a:lnSpc>
+                <a:spcPct val="124444"/>
+              </a:lnSpc>
+              <a:buNone/>
+            </a:pPr>
+            <a:r>
+              <a:rPr lang="en-US" sz="1800" spc="216" kern="0" dirty="0">
+                <a:solidFill>
+                  <a:srgbClr val="6B6F6F"/>
                 </a:solidFill>
                 <a:latin typeface="Courier New" pitchFamily="34" charset="0"/>
                 <a:ea typeface="Courier New" pitchFamily="34" charset="-122"/>
                 <a:cs typeface="Courier New" pitchFamily="34" charset="-120"/>
               </a:rPr>
-              <a:t>$ gds-api-schema-uplift openapi.yaml</a:t>
-            </a:r>
-            <a:endParaRPr lang="en-US" sz="2250" dirty="0"/>
-          </a:p>
-        </p:txBody>
-      </p:sp>
-      <p:sp>
-        <p:nvSpPr>
-          <p:cNvPr id="8" name="Text 6"/>
-          <p:cNvSpPr/>
-          <p:nvPr/>
-        </p:nvSpPr>
-        <p:spPr>
-          <a:xfrm>
-            <a:off x="914400" y="8543627"/>
-            <a:ext cx="8084058" cy="866775"/>
-          </a:xfrm>
-          <a:prstGeom prst="rect">
-            <a:avLst/>
-          </a:prstGeom>
-          <a:noFill/>
-          <a:ln/>
-        </p:spPr>
-        <p:txBody>
-          <a:bodyPr wrap="square" lIns="25400" tIns="25400" rIns="25400" bIns="25400" rtlCol="0" anchor="t">
-            <a:normAutofit/>
-          </a:bodyPr>
-          <a:lstStyle/>
-          <a:p>
-            <a:pPr algn="l" indent="0" marL="0">
-              <a:lnSpc>
-                <a:spcPct val="120833"/>
-              </a:lnSpc>
-              <a:buNone/>
-            </a:pPr>
-            <a:r>
-              <a:rPr lang="en-US" sz="2250" dirty="0">
-                <a:solidFill>
-                  <a:srgbClr val="3D4141"/>
-                </a:solidFill>
-                <a:latin typeface="Helvetica Neue" pitchFamily="34" charset="0"/>
-                <a:ea typeface="Helvetica Neue" pitchFamily="34" charset="-122"/>
-                <a:cs typeface="Helvetica Neue" pitchFamily="34" charset="-120"/>
-              </a:rPr>
-              <a:t>Nothing is written to disk without an explicit yes, and a backup is taken first.</a:t>
-            </a:r>
-            <a:endParaRPr lang="en-US" sz="2250" dirty="0"/>
-          </a:p>
-        </p:txBody>
-      </p:sp>
-      <p:sp>
-        <p:nvSpPr>
-          <p:cNvPr id="9" name="Shape 7"/>
-          <p:cNvSpPr/>
-          <p:nvPr/>
-        </p:nvSpPr>
-        <p:spPr>
-          <a:xfrm>
-            <a:off x="9525000" y="2472630"/>
-            <a:ext cx="7848600" cy="19050"/>
-          </a:xfrm>
-          <a:prstGeom prst="rect">
-            <a:avLst/>
-          </a:prstGeom>
-          <a:solidFill>
-            <a:srgbClr val="D9DCDC"/>
-          </a:solidFill>
-          <a:ln/>
-        </p:spPr>
-      </p:sp>
-      <p:sp>
-        <p:nvSpPr>
-          <p:cNvPr id="10" name="Text 8"/>
-          <p:cNvSpPr/>
-          <p:nvPr/>
-        </p:nvSpPr>
-        <p:spPr>
-          <a:xfrm>
-            <a:off x="9525000" y="1257300"/>
-            <a:ext cx="647700" cy="910530"/>
-          </a:xfrm>
-          <a:prstGeom prst="rect">
-            <a:avLst/>
-          </a:prstGeom>
-          <a:noFill/>
-          <a:ln/>
-        </p:spPr>
-        <p:txBody>
-          <a:bodyPr wrap="square" lIns="25400" tIns="25400" rIns="25400" bIns="25400" rtlCol="0" anchor="t">
-            <a:normAutofit/>
-          </a:bodyPr>
-          <a:lstStyle/>
-          <a:p>
-            <a:pPr algn="l" indent="0" marL="0">
-              <a:buNone/>
-            </a:pPr>
-            <a:r>
-              <a:rPr lang="en-US" sz="1950" dirty="0">
-                <a:solidFill>
-                  <a:srgbClr val="8B8F8F"/>
+              <a:t>TERMINAL</a:t>
+            </a:r>
+            <a:endParaRPr lang="en-US" sz="1800" dirty="0"/>
+          </a:p>
+        </p:txBody>
+      </p:sp>
+      <p:sp>
+        <p:nvSpPr>
+          <p:cNvPr id="17" name="Text 15"/>
+          <p:cNvSpPr/>
+          <p:nvPr/>
+        </p:nvSpPr>
+        <p:spPr>
+          <a:xfrm>
+            <a:off x="1447800" y="8079507"/>
+            <a:ext cx="16931640" cy="624780"/>
+          </a:xfrm>
+          <a:prstGeom prst="rect">
+            <a:avLst/>
+          </a:prstGeom>
+          <a:noFill/>
+          <a:ln/>
+        </p:spPr>
+        <p:txBody>
+          <a:bodyPr wrap="square" lIns="25400" tIns="25400" rIns="25400" bIns="25400" rtlCol="0" anchor="t">
+            <a:normAutofit/>
+          </a:bodyPr>
+          <a:lstStyle/>
+          <a:p>
+            <a:pPr algn="l" indent="0" marL="0">
+              <a:lnSpc>
+                <a:spcPct val="124444"/>
+              </a:lnSpc>
+              <a:buNone/>
+            </a:pPr>
+            <a:r>
+              <a:rPr lang="en-US" sz="3300" dirty="0">
+                <a:solidFill>
+                  <a:srgbClr val="B1CC33"/>
                 </a:solidFill>
                 <a:latin typeface="Courier New" pitchFamily="34" charset="0"/>
                 <a:ea typeface="Courier New" pitchFamily="34" charset="-122"/>
                 <a:cs typeface="Courier New" pitchFamily="34" charset="-120"/>
               </a:rPr>
-              <a:t>01</a:t>
-            </a:r>
-            <a:endParaRPr lang="en-US" sz="1950" dirty="0"/>
-          </a:p>
-        </p:txBody>
-      </p:sp>
-      <p:sp>
-        <p:nvSpPr>
-          <p:cNvPr id="11" name="Text 9"/>
-          <p:cNvSpPr/>
-          <p:nvPr/>
-        </p:nvSpPr>
-        <p:spPr>
-          <a:xfrm>
-            <a:off x="10401300" y="1257300"/>
-            <a:ext cx="7181469" cy="910530"/>
-          </a:xfrm>
-          <a:prstGeom prst="rect">
-            <a:avLst/>
-          </a:prstGeom>
-          <a:noFill/>
-          <a:ln/>
-        </p:spPr>
-        <p:txBody>
-          <a:bodyPr wrap="square" lIns="25400" tIns="25400" rIns="25400" bIns="25400" rtlCol="0" anchor="t">
-            <a:normAutofit/>
-          </a:bodyPr>
-          <a:lstStyle/>
-          <a:p>
-            <a:pPr algn="l" indent="0" marL="0">
-              <a:lnSpc>
-                <a:spcPct val="117895"/>
-              </a:lnSpc>
-              <a:buNone/>
-            </a:pPr>
-            <a:r>
-              <a:rPr lang="en-US" sz="2400" dirty="0">
-                <a:solidFill>
-                  <a:srgbClr val="0B0C0C"/>
-                </a:solidFill>
-                <a:latin typeface="Helvetica Neue" pitchFamily="34" charset="0"/>
-                <a:ea typeface="Helvetica Neue" pitchFamily="34" charset="-122"/>
-                <a:cs typeface="Helvetica Neue" pitchFamily="34" charset="-120"/>
-              </a:rPr>
-              <a:t>Parses the spec and checks it against the </a:t>
-            </a:r>
-            <a:pPr algn="l" indent="0" marL="0">
-              <a:lnSpc>
-                <a:spcPct val="117895"/>
-              </a:lnSpc>
-              <a:buNone/>
-            </a:pPr>
-            <a:r>
-              <a:rPr lang="en-US" sz="2400" b="1" dirty="0">
-                <a:solidFill>
-                  <a:srgbClr val="0B0C0C"/>
-                </a:solidFill>
-                <a:latin typeface="Helvetica Neue" pitchFamily="34" charset="0"/>
-                <a:ea typeface="Helvetica Neue" pitchFamily="34" charset="-122"/>
-                <a:cs typeface="Helvetica Neue" pitchFamily="34" charset="-120"/>
-              </a:rPr>
-              <a:t>GDS and NCSC standards </a:t>
-            </a:r>
-            <a:pPr algn="l" indent="0" marL="0">
-              <a:lnSpc>
-                <a:spcPct val="117895"/>
-              </a:lnSpc>
-              <a:buNone/>
-            </a:pPr>
-            <a:r>
-              <a:rPr lang="en-US" sz="2400" dirty="0">
-                <a:solidFill>
-                  <a:srgbClr val="0B0C0C"/>
-                </a:solidFill>
-                <a:latin typeface="Helvetica Neue" pitchFamily="34" charset="0"/>
-                <a:ea typeface="Helvetica Neue" pitchFamily="34" charset="-122"/>
-                <a:cs typeface="Helvetica Neue" pitchFamily="34" charset="-120"/>
-              </a:rPr>
-              <a:t>.</a:t>
-            </a:r>
-            <a:endParaRPr lang="en-US" sz="2400" dirty="0"/>
-          </a:p>
-        </p:txBody>
-      </p:sp>
-      <p:sp>
-        <p:nvSpPr>
-          <p:cNvPr id="12" name="Shape 10"/>
-          <p:cNvSpPr/>
-          <p:nvPr/>
-        </p:nvSpPr>
-        <p:spPr>
-          <a:xfrm>
-            <a:off x="9525000" y="4769346"/>
-            <a:ext cx="7848600" cy="19050"/>
-          </a:xfrm>
-          <a:prstGeom prst="rect">
-            <a:avLst/>
-          </a:prstGeom>
-          <a:solidFill>
-            <a:srgbClr val="D9DCDC"/>
-          </a:solidFill>
-          <a:ln/>
-        </p:spPr>
-      </p:sp>
-      <p:sp>
-        <p:nvSpPr>
-          <p:cNvPr id="13" name="Text 11"/>
-          <p:cNvSpPr/>
-          <p:nvPr/>
-        </p:nvSpPr>
-        <p:spPr>
-          <a:xfrm>
-            <a:off x="9525000" y="3563541"/>
-            <a:ext cx="647700" cy="901005"/>
-          </a:xfrm>
-          <a:prstGeom prst="rect">
-            <a:avLst/>
-          </a:prstGeom>
-          <a:noFill/>
-          <a:ln/>
-        </p:spPr>
-        <p:txBody>
-          <a:bodyPr wrap="square" lIns="25400" tIns="25400" rIns="25400" bIns="25400" rtlCol="0" anchor="t">
-            <a:normAutofit/>
-          </a:bodyPr>
-          <a:lstStyle/>
-          <a:p>
-            <a:pPr algn="l" indent="0" marL="0">
-              <a:buNone/>
-            </a:pPr>
-            <a:r>
-              <a:rPr lang="en-US" sz="1950" dirty="0">
-                <a:solidFill>
-                  <a:srgbClr val="8B8F8F"/>
-                </a:solidFill>
-                <a:latin typeface="Courier New" pitchFamily="34" charset="0"/>
-                <a:ea typeface="Courier New" pitchFamily="34" charset="-122"/>
-                <a:cs typeface="Courier New" pitchFamily="34" charset="-120"/>
-              </a:rPr>
-              <a:t>02</a:t>
-            </a:r>
-            <a:endParaRPr lang="en-US" sz="1950" dirty="0"/>
-          </a:p>
-        </p:txBody>
-      </p:sp>
-      <p:sp>
-        <p:nvSpPr>
-          <p:cNvPr id="14" name="Text 12"/>
-          <p:cNvSpPr/>
-          <p:nvPr/>
-        </p:nvSpPr>
-        <p:spPr>
-          <a:xfrm>
-            <a:off x="10401300" y="3563541"/>
-            <a:ext cx="7181469" cy="901005"/>
-          </a:xfrm>
-          <a:prstGeom prst="rect">
-            <a:avLst/>
-          </a:prstGeom>
-          <a:noFill/>
-          <a:ln/>
-        </p:spPr>
-        <p:txBody>
-          <a:bodyPr wrap="square" lIns="25400" tIns="25400" rIns="25400" bIns="25400" rtlCol="0" anchor="t">
-            <a:normAutofit/>
-          </a:bodyPr>
-          <a:lstStyle/>
-          <a:p>
-            <a:pPr algn="l" indent="0" marL="0">
-              <a:lnSpc>
-                <a:spcPct val="117895"/>
-              </a:lnSpc>
-              <a:buNone/>
-            </a:pPr>
-            <a:r>
-              <a:rPr lang="en-US" sz="2400" dirty="0">
-                <a:solidFill>
-                  <a:srgbClr val="0B0C0C"/>
-                </a:solidFill>
-                <a:latin typeface="Helvetica Neue" pitchFamily="34" charset="0"/>
-                <a:ea typeface="Helvetica Neue" pitchFamily="34" charset="-122"/>
-                <a:cs typeface="Helvetica Neue" pitchFamily="34" charset="-120"/>
-              </a:rPr>
-              <a:t>Prints each issue alongside the </a:t>
-            </a:r>
-            <a:pPr algn="l" indent="0" marL="0">
-              <a:lnSpc>
-                <a:spcPct val="117895"/>
-              </a:lnSpc>
-              <a:buNone/>
-            </a:pPr>
-            <a:r>
-              <a:rPr lang="en-US" sz="2400" b="1" dirty="0">
-                <a:solidFill>
-                  <a:srgbClr val="0B0C0C"/>
-                </a:solidFill>
-                <a:latin typeface="Helvetica Neue" pitchFamily="34" charset="0"/>
-                <a:ea typeface="Helvetica Neue" pitchFamily="34" charset="-122"/>
-                <a:cs typeface="Helvetica Neue" pitchFamily="34" charset="-120"/>
-              </a:rPr>
-              <a:t>exact clause </a:t>
-            </a:r>
-            <a:pPr algn="l" indent="0" marL="0">
-              <a:lnSpc>
-                <a:spcPct val="117895"/>
-              </a:lnSpc>
-              <a:buNone/>
-            </a:pPr>
-            <a:r>
-              <a:rPr lang="en-US" sz="2400" dirty="0">
-                <a:solidFill>
-                  <a:srgbClr val="0B0C0C"/>
-                </a:solidFill>
-                <a:latin typeface="Helvetica Neue" pitchFamily="34" charset="0"/>
-                <a:ea typeface="Helvetica Neue" pitchFamily="34" charset="-122"/>
-                <a:cs typeface="Helvetica Neue" pitchFamily="34" charset="-120"/>
-              </a:rPr>
-              <a:t>it comes from.</a:t>
-            </a:r>
-            <a:endParaRPr lang="en-US" sz="2400" dirty="0"/>
-          </a:p>
-        </p:txBody>
-      </p:sp>
-      <p:sp>
-        <p:nvSpPr>
-          <p:cNvPr id="15" name="Shape 13"/>
-          <p:cNvSpPr/>
-          <p:nvPr/>
-        </p:nvSpPr>
-        <p:spPr>
-          <a:xfrm>
-            <a:off x="9525000" y="7075587"/>
-            <a:ext cx="7848600" cy="19050"/>
-          </a:xfrm>
-          <a:prstGeom prst="rect">
-            <a:avLst/>
-          </a:prstGeom>
-          <a:solidFill>
-            <a:srgbClr val="D9DCDC"/>
-          </a:solidFill>
-          <a:ln/>
-        </p:spPr>
-      </p:sp>
-      <p:sp>
-        <p:nvSpPr>
-          <p:cNvPr id="16" name="Text 14"/>
-          <p:cNvSpPr/>
-          <p:nvPr/>
-        </p:nvSpPr>
-        <p:spPr>
-          <a:xfrm>
-            <a:off x="9525000" y="5860256"/>
-            <a:ext cx="647700" cy="910530"/>
-          </a:xfrm>
-          <a:prstGeom prst="rect">
-            <a:avLst/>
-          </a:prstGeom>
-          <a:noFill/>
-          <a:ln/>
-        </p:spPr>
-        <p:txBody>
-          <a:bodyPr wrap="square" lIns="25400" tIns="25400" rIns="25400" bIns="25400" rtlCol="0" anchor="t">
-            <a:normAutofit/>
-          </a:bodyPr>
-          <a:lstStyle/>
-          <a:p>
-            <a:pPr algn="l" indent="0" marL="0">
-              <a:buNone/>
-            </a:pPr>
-            <a:r>
-              <a:rPr lang="en-US" sz="1950" dirty="0">
-                <a:solidFill>
-                  <a:srgbClr val="8B8F8F"/>
-                </a:solidFill>
-                <a:latin typeface="Courier New" pitchFamily="34" charset="0"/>
-                <a:ea typeface="Courier New" pitchFamily="34" charset="-122"/>
-                <a:cs typeface="Courier New" pitchFamily="34" charset="-120"/>
-              </a:rPr>
-              <a:t>03</a:t>
-            </a:r>
-            <a:endParaRPr lang="en-US" sz="1950" dirty="0"/>
-          </a:p>
-        </p:txBody>
-      </p:sp>
-      <p:sp>
-        <p:nvSpPr>
-          <p:cNvPr id="17" name="Text 15"/>
-          <p:cNvSpPr/>
-          <p:nvPr/>
-        </p:nvSpPr>
-        <p:spPr>
-          <a:xfrm>
-            <a:off x="10401300" y="5860256"/>
-            <a:ext cx="7181469" cy="910530"/>
-          </a:xfrm>
-          <a:prstGeom prst="rect">
-            <a:avLst/>
-          </a:prstGeom>
-          <a:noFill/>
-          <a:ln/>
-        </p:spPr>
-        <p:txBody>
-          <a:bodyPr wrap="square" lIns="25400" tIns="25400" rIns="25400" bIns="25400" rtlCol="0" anchor="t">
-            <a:normAutofit/>
-          </a:bodyPr>
-          <a:lstStyle/>
-          <a:p>
-            <a:pPr algn="l" indent="0" marL="0">
-              <a:lnSpc>
-                <a:spcPct val="117895"/>
-              </a:lnSpc>
-              <a:buNone/>
-            </a:pPr>
-            <a:r>
-              <a:rPr lang="en-US" sz="2400" dirty="0">
-                <a:solidFill>
-                  <a:srgbClr val="0B0C0C"/>
-                </a:solidFill>
-                <a:latin typeface="Helvetica Neue" pitchFamily="34" charset="0"/>
-                <a:ea typeface="Helvetica Neue" pitchFamily="34" charset="-122"/>
-                <a:cs typeface="Helvetica Neue" pitchFamily="34" charset="-120"/>
-              </a:rPr>
-              <a:t>For anything needing judgement, </a:t>
-            </a:r>
-            <a:pPr algn="l" indent="0" marL="0">
-              <a:lnSpc>
-                <a:spcPct val="117895"/>
-              </a:lnSpc>
-              <a:buNone/>
-            </a:pPr>
-            <a:r>
-              <a:rPr lang="en-US" sz="2400" b="1" dirty="0">
-                <a:solidFill>
-                  <a:srgbClr val="0B0C0C"/>
-                </a:solidFill>
-                <a:latin typeface="Helvetica Neue" pitchFamily="34" charset="0"/>
-                <a:ea typeface="Helvetica Neue" pitchFamily="34" charset="-122"/>
-                <a:cs typeface="Helvetica Neue" pitchFamily="34" charset="-120"/>
-              </a:rPr>
-              <a:t>Claude proposes a concrete fix </a:t>
-            </a:r>
-            <a:pPr algn="l" indent="0" marL="0">
-              <a:lnSpc>
-                <a:spcPct val="117895"/>
-              </a:lnSpc>
-              <a:buNone/>
-            </a:pPr>
-            <a:r>
-              <a:rPr lang="en-US" sz="2400" dirty="0">
-                <a:solidFill>
-                  <a:srgbClr val="0B0C0C"/>
-                </a:solidFill>
-                <a:latin typeface="Helvetica Neue" pitchFamily="34" charset="0"/>
-                <a:ea typeface="Helvetica Neue" pitchFamily="34" charset="-122"/>
-                <a:cs typeface="Helvetica Neue" pitchFamily="34" charset="-120"/>
-              </a:rPr>
-              <a:t>.</a:t>
-            </a:r>
-            <a:endParaRPr lang="en-US" sz="2400" dirty="0"/>
-          </a:p>
-        </p:txBody>
-      </p:sp>
-      <p:sp>
-        <p:nvSpPr>
-          <p:cNvPr id="18" name="Text 16"/>
-          <p:cNvSpPr/>
-          <p:nvPr/>
-        </p:nvSpPr>
-        <p:spPr>
-          <a:xfrm>
-            <a:off x="9525000" y="8166497"/>
-            <a:ext cx="647700" cy="901005"/>
-          </a:xfrm>
-          <a:prstGeom prst="rect">
-            <a:avLst/>
-          </a:prstGeom>
-          <a:noFill/>
-          <a:ln/>
-        </p:spPr>
-        <p:txBody>
-          <a:bodyPr wrap="square" lIns="25400" tIns="25400" rIns="25400" bIns="25400" rtlCol="0" anchor="t">
-            <a:normAutofit/>
-          </a:bodyPr>
-          <a:lstStyle/>
-          <a:p>
-            <a:pPr algn="l" indent="0" marL="0">
-              <a:buNone/>
-            </a:pPr>
-            <a:r>
-              <a:rPr lang="en-US" sz="1950" dirty="0">
-                <a:solidFill>
-                  <a:srgbClr val="8B8F8F"/>
-                </a:solidFill>
-                <a:latin typeface="Courier New" pitchFamily="34" charset="0"/>
-                <a:ea typeface="Courier New" pitchFamily="34" charset="-122"/>
-                <a:cs typeface="Courier New" pitchFamily="34" charset="-120"/>
-              </a:rPr>
-              <a:t>04</a:t>
-            </a:r>
-            <a:endParaRPr lang="en-US" sz="1950" dirty="0"/>
-          </a:p>
-        </p:txBody>
-      </p:sp>
-      <p:sp>
-        <p:nvSpPr>
-          <p:cNvPr id="19" name="Text 17"/>
-          <p:cNvSpPr/>
-          <p:nvPr/>
-        </p:nvSpPr>
-        <p:spPr>
-          <a:xfrm>
-            <a:off x="10401300" y="8166497"/>
-            <a:ext cx="7181469" cy="901005"/>
-          </a:xfrm>
-          <a:prstGeom prst="rect">
-            <a:avLst/>
-          </a:prstGeom>
-          <a:noFill/>
-          <a:ln/>
-        </p:spPr>
-        <p:txBody>
-          <a:bodyPr wrap="square" lIns="25400" tIns="25400" rIns="25400" bIns="25400" rtlCol="0" anchor="t">
-            <a:normAutofit/>
-          </a:bodyPr>
-          <a:lstStyle/>
-          <a:p>
-            <a:pPr algn="l" indent="0" marL="0">
-              <a:lnSpc>
-                <a:spcPct val="117895"/>
-              </a:lnSpc>
-              <a:buNone/>
-            </a:pPr>
-            <a:r>
-              <a:rPr lang="en-US" sz="2400" dirty="0">
-                <a:solidFill>
-                  <a:srgbClr val="0B0C0C"/>
-                </a:solidFill>
-                <a:latin typeface="Helvetica Neue" pitchFamily="34" charset="0"/>
-                <a:ea typeface="Helvetica Neue" pitchFamily="34" charset="-122"/>
-                <a:cs typeface="Helvetica Neue" pitchFamily="34" charset="-120"/>
-              </a:rPr>
-              <a:t>The developer walks the findings one at a time — </a:t>
-            </a:r>
-            <a:pPr algn="l" indent="0" marL="0">
-              <a:lnSpc>
-                <a:spcPct val="117895"/>
-              </a:lnSpc>
-              <a:buNone/>
-            </a:pPr>
-            <a:r>
-              <a:rPr lang="en-US" sz="2400" dirty="0">
-                <a:solidFill>
-                  <a:srgbClr val="0B0C0C"/>
-                </a:solidFill>
-                <a:highlight>
-                  <a:srgbClr val="FFDD00"/>
-                </a:highlight>
-                <a:latin typeface="Courier New" pitchFamily="34" charset="0"/>
-                <a:ea typeface="Courier New" pitchFamily="34" charset="-122"/>
-                <a:cs typeface="Courier New" pitchFamily="34" charset="-120"/>
-              </a:rPr>
-              <a:t>accept, skip, edit, quit</a:t>
-            </a:r>
-            <a:pPr algn="l" indent="0" marL="0">
-              <a:lnSpc>
-                <a:spcPct val="117895"/>
-              </a:lnSpc>
-              <a:buNone/>
-            </a:pPr>
-            <a:r>
-              <a:rPr lang="en-US" sz="2400" dirty="0">
-                <a:solidFill>
-                  <a:srgbClr val="0B0C0C"/>
-                </a:solidFill>
-                <a:latin typeface="Helvetica Neue" pitchFamily="34" charset="0"/>
-                <a:ea typeface="Helvetica Neue" pitchFamily="34" charset="-122"/>
-                <a:cs typeface="Helvetica Neue" pitchFamily="34" charset="-120"/>
-              </a:rPr>
-              <a:t>.</a:t>
-            </a:r>
-            <a:endParaRPr lang="en-US" sz="2400" dirty="0"/>
+              <a:t>$ gds-api-schema-uplift openapi.yaml</a:t>
+            </a:r>
+            <a:endParaRPr lang="en-US" sz="3300" dirty="0"/>
           </a:p>
         </p:txBody>
       </p:sp>
@@ -2919,8 +3089,8 @@
         </p:nvSpPr>
         <p:spPr>
           <a:xfrm>
-            <a:off x="914400" y="3580507"/>
-            <a:ext cx="7770049" cy="342900"/>
+            <a:off x="914400" y="3585270"/>
+            <a:ext cx="7770049" cy="333375"/>
           </a:xfrm>
           <a:prstGeom prst="rect">
             <a:avLst/>
@@ -2960,7 +3130,7 @@
         </p:nvSpPr>
         <p:spPr>
           <a:xfrm>
-            <a:off x="914400" y="4190107"/>
+            <a:off x="914400" y="4185345"/>
             <a:ext cx="7770049" cy="1323975"/>
           </a:xfrm>
           <a:prstGeom prst="rect">
@@ -2977,7 +3147,7 @@
           <a:p>
             <a:pPr algn="l" indent="0" marL="0">
               <a:lnSpc>
-                <a:spcPct val="73770"/>
+                <a:spcPct val="73569"/>
               </a:lnSpc>
               <a:buNone/>
             </a:pPr>
@@ -3004,8 +3174,8 @@
         </p:nvSpPr>
         <p:spPr>
           <a:xfrm>
-            <a:off x="914400" y="5780782"/>
-            <a:ext cx="4320102" cy="963811"/>
+            <a:off x="914400" y="5776020"/>
+            <a:ext cx="4320179" cy="963811"/>
           </a:xfrm>
           <a:prstGeom prst="rect">
             <a:avLst/>
@@ -3087,7 +3257,7 @@
           <a:p>
             <a:pPr algn="l" indent="0" marL="0">
               <a:lnSpc>
-                <a:spcPct val="123030"/>
+                <a:spcPct val="124923"/>
               </a:lnSpc>
               <a:buNone/>
             </a:pPr>
@@ -3131,7 +3301,7 @@
           <a:p>
             <a:pPr algn="l" indent="0" marL="0">
               <a:lnSpc>
-                <a:spcPct val="123030"/>
+                <a:spcPct val="124923"/>
               </a:lnSpc>
               <a:buNone/>
             </a:pPr>
@@ -3175,7 +3345,7 @@
           <a:p>
             <a:pPr algn="l" indent="0" marL="0">
               <a:lnSpc>
-                <a:spcPct val="123030"/>
+                <a:spcPct val="124923"/>
               </a:lnSpc>
               <a:buNone/>
             </a:pPr>
@@ -3219,7 +3389,7 @@
           <a:p>
             <a:pPr algn="l" indent="0" marL="0">
               <a:lnSpc>
-                <a:spcPct val="123030"/>
+                <a:spcPct val="124923"/>
               </a:lnSpc>
               <a:buNone/>
             </a:pPr>
@@ -3263,7 +3433,7 @@
           <a:p>
             <a:pPr algn="l" indent="0" marL="0">
               <a:lnSpc>
-                <a:spcPct val="123030"/>
+                <a:spcPct val="124923"/>
               </a:lnSpc>
               <a:buNone/>
             </a:pPr>
@@ -3307,7 +3477,7 @@
           <a:p>
             <a:pPr algn="l" indent="0" marL="0">
               <a:lnSpc>
-                <a:spcPct val="123030"/>
+                <a:spcPct val="124923"/>
               </a:lnSpc>
               <a:buNone/>
             </a:pPr>
@@ -3324,7 +3494,7 @@
             </a:r>
             <a:pPr algn="l" indent="0" marL="0">
               <a:lnSpc>
-                <a:spcPct val="123030"/>
+                <a:spcPct val="124923"/>
               </a:lnSpc>
               <a:buNone/>
             </a:pPr>
@@ -3344,7 +3514,7 @@
             </a:r>
             <a:pPr algn="l" indent="0" marL="0">
               <a:lnSpc>
-                <a:spcPct val="123030"/>
+                <a:spcPct val="124923"/>
               </a:lnSpc>
               <a:buNone/>
             </a:pPr>
@@ -3388,7 +3558,7 @@
           <a:p>
             <a:pPr algn="l" indent="0" marL="0">
               <a:lnSpc>
-                <a:spcPct val="123030"/>
+                <a:spcPct val="124923"/>
               </a:lnSpc>
               <a:buNone/>
             </a:pPr>
@@ -3416,23 +3586,23 @@
         <p:spPr>
           <a:xfrm>
             <a:off x="9705975" y="5276850"/>
-            <a:ext cx="5861343" cy="424755"/>
-          </a:xfrm>
-          <a:prstGeom prst="rect">
-            <a:avLst/>
-          </a:prstGeom>
-          <a:noFill/>
-          <a:ln/>
-        </p:spPr>
-        <p:txBody>
-          <a:bodyPr wrap="square" lIns="25400" tIns="25400" rIns="25400" bIns="25400" rtlCol="0" anchor="t">
-            <a:normAutofit/>
-          </a:bodyPr>
-          <a:lstStyle/>
-          <a:p>
-            <a:pPr algn="l" indent="0" marL="0">
-              <a:lnSpc>
-                <a:spcPct val="123030"/>
+            <a:ext cx="5861261" cy="424755"/>
+          </a:xfrm>
+          <a:prstGeom prst="rect">
+            <a:avLst/>
+          </a:prstGeom>
+          <a:noFill/>
+          <a:ln/>
+        </p:spPr>
+        <p:txBody>
+          <a:bodyPr wrap="square" lIns="25400" tIns="25400" rIns="25400" bIns="25400" rtlCol="0" anchor="t">
+            <a:normAutofit/>
+          </a:bodyPr>
+          <a:lstStyle/>
+          <a:p>
+            <a:pPr algn="l" indent="0" marL="0">
+              <a:lnSpc>
+                <a:spcPct val="124923"/>
               </a:lnSpc>
               <a:buNone/>
             </a:pPr>
@@ -3449,7 +3619,7 @@
             </a:r>
             <a:pPr algn="l" indent="0" marL="0">
               <a:lnSpc>
-                <a:spcPct val="123030"/>
+                <a:spcPct val="124923"/>
               </a:lnSpc>
               <a:buNone/>
             </a:pPr>
@@ -3469,7 +3639,7 @@
             </a:r>
             <a:pPr algn="l" indent="0" marL="0">
               <a:lnSpc>
-                <a:spcPct val="123030"/>
+                <a:spcPct val="124923"/>
               </a:lnSpc>
               <a:buNone/>
             </a:pPr>
@@ -3513,7 +3683,7 @@
           <a:p>
             <a:pPr algn="l" indent="0" marL="0">
               <a:lnSpc>
-                <a:spcPct val="123030"/>
+                <a:spcPct val="124923"/>
               </a:lnSpc>
               <a:buNone/>
             </a:pPr>
@@ -3557,7 +3727,7 @@
           <a:p>
             <a:pPr algn="l" indent="0" marL="0">
               <a:lnSpc>
-                <a:spcPct val="123030"/>
+                <a:spcPct val="124923"/>
               </a:lnSpc>
               <a:buNone/>
             </a:pPr>
@@ -3574,7 +3744,7 @@
             </a:r>
             <a:pPr algn="l" indent="0" marL="0">
               <a:lnSpc>
-                <a:spcPct val="123030"/>
+                <a:spcPct val="124923"/>
               </a:lnSpc>
               <a:buNone/>
             </a:pPr>
@@ -3594,7 +3764,7 @@
             </a:r>
             <a:pPr algn="l" indent="0" marL="0">
               <a:lnSpc>
-                <a:spcPct val="123030"/>
+                <a:spcPct val="124923"/>
               </a:lnSpc>
               <a:buNone/>
             </a:pPr>
@@ -3638,7 +3808,7 @@
           <a:p>
             <a:pPr algn="l" indent="0" marL="0">
               <a:lnSpc>
-                <a:spcPct val="123030"/>
+                <a:spcPct val="124923"/>
               </a:lnSpc>
               <a:buNone/>
             </a:pPr>
@@ -3682,7 +3852,7 @@
           <a:p>
             <a:pPr algn="l" indent="0" marL="0">
               <a:lnSpc>
-                <a:spcPct val="123030"/>
+                <a:spcPct val="124923"/>
               </a:lnSpc>
               <a:buNone/>
             </a:pPr>
@@ -3758,7 +3928,7 @@
           <a:p>
             <a:pPr algn="l" indent="0" marL="0">
               <a:lnSpc>
-                <a:spcPct val="82474"/>
+                <a:spcPct val="81633"/>
               </a:lnSpc>
               <a:buNone/>
             </a:pPr>
@@ -3785,8 +3955,8 @@
         </p:nvSpPr>
         <p:spPr>
           <a:xfrm>
-            <a:off x="14740086" y="1343025"/>
-            <a:ext cx="2896865" cy="342900"/>
+            <a:off x="14740086" y="1347788"/>
+            <a:ext cx="2896865" cy="333375"/>
           </a:xfrm>
           <a:prstGeom prst="rect">
             <a:avLst/>
@@ -3885,7 +4055,7 @@
           <a:p>
             <a:pPr algn="l" indent="0" marL="0">
               <a:lnSpc>
-                <a:spcPct val="86250"/>
+                <a:spcPct val="85487"/>
               </a:lnSpc>
               <a:buNone/>
             </a:pPr>
@@ -3913,23 +4083,23 @@
         <p:spPr>
           <a:xfrm>
             <a:off x="1371600" y="3546128"/>
-            <a:ext cx="4447489" cy="2247454"/>
-          </a:xfrm>
-          <a:prstGeom prst="rect">
-            <a:avLst/>
-          </a:prstGeom>
-          <a:noFill/>
-          <a:ln/>
-        </p:spPr>
-        <p:txBody>
-          <a:bodyPr wrap="square" lIns="25400" tIns="25400" rIns="25400" bIns="25400" rtlCol="0" anchor="t">
-            <a:normAutofit/>
-          </a:bodyPr>
-          <a:lstStyle/>
-          <a:p>
-            <a:pPr algn="l" indent="0" marL="0">
-              <a:lnSpc>
-                <a:spcPct val="122105"/>
+            <a:ext cx="4447489" cy="2247826"/>
+          </a:xfrm>
+          <a:prstGeom prst="rect">
+            <a:avLst/>
+          </a:prstGeom>
+          <a:noFill/>
+          <a:ln/>
+        </p:spPr>
+        <p:txBody>
+          <a:bodyPr wrap="square" lIns="25400" tIns="25400" rIns="25400" bIns="25400" rtlCol="0" anchor="t">
+            <a:normAutofit/>
+          </a:bodyPr>
+          <a:lstStyle/>
+          <a:p>
+            <a:pPr algn="l" indent="0" marL="0">
+              <a:lnSpc>
+                <a:spcPct val="120519"/>
               </a:lnSpc>
               <a:buNone/>
             </a:pPr>
@@ -3956,7 +4126,7 @@
         </p:nvSpPr>
         <p:spPr>
           <a:xfrm>
-            <a:off x="1371600" y="8324850"/>
+            <a:off x="1371600" y="8334375"/>
             <a:ext cx="4317950" cy="19050"/>
           </a:xfrm>
           <a:prstGeom prst="rect">
@@ -3976,8 +4146,8 @@
         </p:nvSpPr>
         <p:spPr>
           <a:xfrm>
-            <a:off x="1371600" y="8610600"/>
-            <a:ext cx="4447489" cy="342900"/>
+            <a:off x="1371600" y="8620125"/>
+            <a:ext cx="4447489" cy="333375"/>
           </a:xfrm>
           <a:prstGeom prst="rect">
             <a:avLst/>
@@ -4018,7 +4188,7 @@
         <p:spPr>
           <a:xfrm>
             <a:off x="6527750" y="2209800"/>
-            <a:ext cx="5232350" cy="7162800"/>
+            <a:ext cx="5232425" cy="7162800"/>
           </a:xfrm>
           <a:prstGeom prst="roundRect">
             <a:avLst>
@@ -4040,7 +4210,7 @@
         <p:spPr>
           <a:xfrm>
             <a:off x="6527750" y="2209800"/>
-            <a:ext cx="5232350" cy="152400"/>
+            <a:ext cx="5232425" cy="152400"/>
           </a:xfrm>
           <a:prstGeom prst="rect">
             <a:avLst/>
@@ -4060,23 +4230,23 @@
         <p:spPr>
           <a:xfrm>
             <a:off x="6984950" y="2819400"/>
-            <a:ext cx="4749745" cy="498128"/>
-          </a:xfrm>
-          <a:prstGeom prst="rect">
-            <a:avLst/>
-          </a:prstGeom>
-          <a:noFill/>
-          <a:ln/>
-        </p:spPr>
-        <p:txBody>
-          <a:bodyPr wrap="square" lIns="25400" tIns="25400" rIns="25400" bIns="25400" rtlCol="0" anchor="t">
-            <a:normAutofit/>
-          </a:bodyPr>
-          <a:lstStyle/>
-          <a:p>
-            <a:pPr algn="l" indent="0" marL="0">
-              <a:lnSpc>
-                <a:spcPct val="86250"/>
+            <a:ext cx="4749827" cy="498128"/>
+          </a:xfrm>
+          <a:prstGeom prst="rect">
+            <a:avLst/>
+          </a:prstGeom>
+          <a:noFill/>
+          <a:ln/>
+        </p:spPr>
+        <p:txBody>
+          <a:bodyPr wrap="square" lIns="25400" tIns="25400" rIns="25400" bIns="25400" rtlCol="0" anchor="t">
+            <a:normAutofit/>
+          </a:bodyPr>
+          <a:lstStyle/>
+          <a:p>
+            <a:pPr algn="l" indent="0" marL="0">
+              <a:lnSpc>
+                <a:spcPct val="85487"/>
               </a:lnSpc>
               <a:buNone/>
             </a:pPr>
@@ -4104,23 +4274,23 @@
         <p:spPr>
           <a:xfrm>
             <a:off x="6984950" y="3546128"/>
-            <a:ext cx="4447489" cy="2247454"/>
-          </a:xfrm>
-          <a:prstGeom prst="rect">
-            <a:avLst/>
-          </a:prstGeom>
-          <a:noFill/>
-          <a:ln/>
-        </p:spPr>
-        <p:txBody>
-          <a:bodyPr wrap="square" lIns="25400" tIns="25400" rIns="25400" bIns="25400" rtlCol="0" anchor="t">
-            <a:normAutofit/>
-          </a:bodyPr>
-          <a:lstStyle/>
-          <a:p>
-            <a:pPr algn="l" indent="0" marL="0">
-              <a:lnSpc>
-                <a:spcPct val="122105"/>
+            <a:ext cx="4447566" cy="2247826"/>
+          </a:xfrm>
+          <a:prstGeom prst="rect">
+            <a:avLst/>
+          </a:prstGeom>
+          <a:noFill/>
+          <a:ln/>
+        </p:spPr>
+        <p:txBody>
+          <a:bodyPr wrap="square" lIns="25400" tIns="25400" rIns="25400" bIns="25400" rtlCol="0" anchor="t">
+            <a:normAutofit/>
+          </a:bodyPr>
+          <a:lstStyle/>
+          <a:p>
+            <a:pPr algn="l" indent="0" marL="0">
+              <a:lnSpc>
+                <a:spcPct val="120519"/>
               </a:lnSpc>
               <a:buNone/>
             </a:pPr>
@@ -4147,8 +4317,8 @@
         </p:nvSpPr>
         <p:spPr>
           <a:xfrm>
-            <a:off x="6984950" y="8324850"/>
-            <a:ext cx="4317950" cy="19050"/>
+            <a:off x="6984950" y="8334375"/>
+            <a:ext cx="4318025" cy="19050"/>
           </a:xfrm>
           <a:prstGeom prst="rect">
             <a:avLst/>
@@ -4167,8 +4337,8 @@
         </p:nvSpPr>
         <p:spPr>
           <a:xfrm>
-            <a:off x="6984950" y="8610600"/>
-            <a:ext cx="4447489" cy="342900"/>
+            <a:off x="6984950" y="8620125"/>
+            <a:ext cx="4447566" cy="333375"/>
           </a:xfrm>
           <a:prstGeom prst="rect">
             <a:avLst/>
@@ -4208,7 +4378,7 @@
         </p:nvSpPr>
         <p:spPr>
           <a:xfrm>
-            <a:off x="12141101" y="2209800"/>
+            <a:off x="12141175" y="2209800"/>
             <a:ext cx="5232350" cy="7162800"/>
           </a:xfrm>
           <a:prstGeom prst="roundRect">
@@ -4230,7 +4400,7 @@
         </p:nvSpPr>
         <p:spPr>
           <a:xfrm>
-            <a:off x="12141101" y="2209800"/>
+            <a:off x="12141175" y="2209800"/>
             <a:ext cx="5232350" cy="152400"/>
           </a:xfrm>
           <a:prstGeom prst="rect">
@@ -4250,7 +4420,7 @@
         </p:nvSpPr>
         <p:spPr>
           <a:xfrm>
-            <a:off x="12598301" y="2819400"/>
+            <a:off x="12598375" y="2819400"/>
             <a:ext cx="4749745" cy="498128"/>
           </a:xfrm>
           <a:prstGeom prst="rect">
@@ -4267,7 +4437,7 @@
           <a:p>
             <a:pPr algn="l" indent="0" marL="0">
               <a:lnSpc>
-                <a:spcPct val="86250"/>
+                <a:spcPct val="85487"/>
               </a:lnSpc>
               <a:buNone/>
             </a:pPr>
@@ -4294,24 +4464,24 @@
         </p:nvSpPr>
         <p:spPr>
           <a:xfrm>
-            <a:off x="12598301" y="3546128"/>
-            <a:ext cx="4447489" cy="1834158"/>
-          </a:xfrm>
-          <a:prstGeom prst="rect">
-            <a:avLst/>
-          </a:prstGeom>
-          <a:noFill/>
-          <a:ln/>
-        </p:spPr>
-        <p:txBody>
-          <a:bodyPr wrap="square" lIns="25400" tIns="25400" rIns="25400" bIns="25400" rtlCol="0" anchor="t">
-            <a:normAutofit/>
-          </a:bodyPr>
-          <a:lstStyle/>
-          <a:p>
-            <a:pPr algn="l" indent="0" marL="0">
-              <a:lnSpc>
-                <a:spcPct val="122105"/>
+            <a:off x="12598375" y="3546128"/>
+            <a:ext cx="4447489" cy="1834455"/>
+          </a:xfrm>
+          <a:prstGeom prst="rect">
+            <a:avLst/>
+          </a:prstGeom>
+          <a:noFill/>
+          <a:ln/>
+        </p:spPr>
+        <p:txBody>
+          <a:bodyPr wrap="square" lIns="25400" tIns="25400" rIns="25400" bIns="25400" rtlCol="0" anchor="t">
+            <a:normAutofit/>
+          </a:bodyPr>
+          <a:lstStyle/>
+          <a:p>
+            <a:pPr algn="l" indent="0" marL="0">
+              <a:lnSpc>
+                <a:spcPct val="120519"/>
               </a:lnSpc>
               <a:buNone/>
             </a:pPr>
@@ -4328,7 +4498,7 @@
             </a:r>
             <a:pPr algn="l" indent="0" marL="0">
               <a:lnSpc>
-                <a:spcPct val="122105"/>
+                <a:spcPct val="120519"/>
               </a:lnSpc>
               <a:buNone/>
             </a:pPr>
@@ -4345,7 +4515,7 @@
             </a:r>
             <a:pPr algn="l" indent="0" marL="0">
               <a:lnSpc>
-                <a:spcPct val="122105"/>
+                <a:spcPct val="120519"/>
               </a:lnSpc>
               <a:buNone/>
             </a:pPr>
@@ -4372,7 +4542,7 @@
         </p:nvSpPr>
         <p:spPr>
           <a:xfrm>
-            <a:off x="12598301" y="8324850"/>
+            <a:off x="12598375" y="8334375"/>
             <a:ext cx="4317950" cy="19050"/>
           </a:xfrm>
           <a:prstGeom prst="rect">
@@ -4392,8 +4562,8 @@
         </p:nvSpPr>
         <p:spPr>
           <a:xfrm>
-            <a:off x="12598301" y="8610600"/>
-            <a:ext cx="4447489" cy="342900"/>
+            <a:off x="12598375" y="8620125"/>
+            <a:ext cx="4447489" cy="333375"/>
           </a:xfrm>
           <a:prstGeom prst="rect">
             <a:avLst/>
@@ -4465,7 +4635,7 @@
         </p:nvSpPr>
         <p:spPr>
           <a:xfrm>
-            <a:off x="914400" y="933450"/>
+            <a:off x="914400" y="928688"/>
             <a:ext cx="266700" cy="266700"/>
           </a:xfrm>
           <a:prstGeom prst="roundRect">
@@ -4488,7 +4658,7 @@
         <p:spPr>
           <a:xfrm>
             <a:off x="1409700" y="914400"/>
-            <a:ext cx="2715801" cy="342900"/>
+            <a:ext cx="2715801" cy="333375"/>
           </a:xfrm>
           <a:prstGeom prst="rect">
             <a:avLst/>
@@ -4528,14 +4698,16 @@
         </p:nvSpPr>
         <p:spPr>
           <a:xfrm>
-            <a:off x="914400" y="1676400"/>
-            <a:ext cx="7848600" cy="38100"/>
-          </a:xfrm>
-          <a:prstGeom prst="rect">
-            <a:avLst/>
-          </a:prstGeom>
-          <a:solidFill>
-            <a:srgbClr val="0B0C0C"/>
+            <a:off x="914400" y="1857375"/>
+            <a:ext cx="190500" cy="190500"/>
+          </a:xfrm>
+          <a:prstGeom prst="roundRect">
+            <a:avLst>
+              <a:gd name="adj" fmla="val 30000"/>
+            </a:avLst>
+          </a:prstGeom>
+          <a:solidFill>
+            <a:srgbClr val="FFDD00"/>
           </a:solidFill>
           <a:ln/>
         </p:spPr>
@@ -4548,26 +4720,29 @@
         </p:nvSpPr>
         <p:spPr>
           <a:xfrm>
-            <a:off x="914400" y="1943100"/>
-            <a:ext cx="8633460" cy="457200"/>
-          </a:xfrm>
-          <a:prstGeom prst="rect">
-            <a:avLst/>
-          </a:prstGeom>
-          <a:noFill/>
-          <a:ln/>
-        </p:spPr>
-        <p:txBody>
-          <a:bodyPr wrap="square" lIns="25400" tIns="25400" rIns="25400" bIns="25400" rtlCol="0" anchor="t">
-            <a:normAutofit/>
-          </a:bodyPr>
-          <a:lstStyle/>
-          <a:p>
-            <a:pPr algn="l" indent="0" marL="0">
-              <a:buNone/>
-            </a:pPr>
-            <a:r>
-              <a:rPr lang="en-US" sz="2700" b="1" dirty="0">
+            <a:off x="1371600" y="1704975"/>
+            <a:ext cx="16482060" cy="998190"/>
+          </a:xfrm>
+          <a:prstGeom prst="rect">
+            <a:avLst/>
+          </a:prstGeom>
+          <a:noFill/>
+          <a:ln/>
+        </p:spPr>
+        <p:txBody>
+          <a:bodyPr wrap="square" lIns="25400" tIns="25400" rIns="25400" bIns="25400" rtlCol="0" anchor="t">
+            <a:normAutofit/>
+          </a:bodyPr>
+          <a:lstStyle/>
+          <a:p>
+            <a:pPr algn="l" indent="0" marL="0">
+              <a:lnSpc>
+                <a:spcPct val="117209"/>
+              </a:lnSpc>
+              <a:buNone/>
+            </a:pPr>
+            <a:r>
+              <a:rPr lang="en-US" sz="2700" dirty="0">
                 <a:solidFill>
                   <a:srgbClr val="0B0C0C"/>
                 </a:solidFill>
@@ -4575,104 +4750,33 @@
                 <a:ea typeface="Helvetica Neue" pitchFamily="34" charset="-122"/>
                 <a:cs typeface="Helvetica Neue" pitchFamily="34" charset="-120"/>
               </a:rPr>
-              <a:t>Cheapest place to fix</a:t>
-            </a:r>
-            <a:endParaRPr lang="en-US" sz="2700" dirty="0"/>
-          </a:p>
-        </p:txBody>
-      </p:sp>
-      <p:sp>
-        <p:nvSpPr>
-          <p:cNvPr id="6" name="Text 4"/>
-          <p:cNvSpPr/>
-          <p:nvPr/>
-        </p:nvSpPr>
-        <p:spPr>
-          <a:xfrm>
-            <a:off x="914400" y="2495550"/>
-            <a:ext cx="8084058" cy="811411"/>
-          </a:xfrm>
-          <a:prstGeom prst="rect">
-            <a:avLst/>
-          </a:prstGeom>
-          <a:noFill/>
-          <a:ln/>
-        </p:spPr>
-        <p:txBody>
-          <a:bodyPr wrap="square" lIns="25400" tIns="25400" rIns="25400" bIns="25400" rtlCol="0" anchor="t">
-            <a:normAutofit/>
-          </a:bodyPr>
-          <a:lstStyle/>
-          <a:p>
-            <a:pPr algn="l" indent="0" marL="0">
-              <a:lnSpc>
-                <a:spcPct val="116000"/>
-              </a:lnSpc>
-              <a:buNone/>
-            </a:pPr>
-            <a:r>
-              <a:rPr lang="en-US" sz="2175" dirty="0">
-                <a:solidFill>
-                  <a:srgbClr val="3D4141"/>
+              <a:t>Compliance moves from a code-review problem to a </a:t>
+            </a:r>
+            <a:pPr algn="l" indent="0" marL="0">
+              <a:lnSpc>
+                <a:spcPct val="117209"/>
+              </a:lnSpc>
+              <a:buNone/>
+            </a:pPr>
+            <a:r>
+              <a:rPr lang="en-US" sz="2700" b="1" dirty="0">
+                <a:solidFill>
+                  <a:srgbClr val="0B0C0C"/>
                 </a:solidFill>
                 <a:latin typeface="Helvetica Neue" pitchFamily="34" charset="0"/>
                 <a:ea typeface="Helvetica Neue" pitchFamily="34" charset="-122"/>
                 <a:cs typeface="Helvetica Neue" pitchFamily="34" charset="-120"/>
               </a:rPr>
-              <a:t>Compliance moves from a code-review problem to a before-you-commit problem.</a:t>
-            </a:r>
-            <a:endParaRPr lang="en-US" sz="2175" dirty="0"/>
-          </a:p>
-        </p:txBody>
-      </p:sp>
-      <p:sp>
-        <p:nvSpPr>
-          <p:cNvPr id="7" name="Shape 5"/>
-          <p:cNvSpPr/>
-          <p:nvPr/>
-        </p:nvSpPr>
-        <p:spPr>
-          <a:xfrm>
-            <a:off x="9525000" y="1676400"/>
-            <a:ext cx="7848600" cy="38100"/>
-          </a:xfrm>
-          <a:prstGeom prst="rect">
-            <a:avLst/>
-          </a:prstGeom>
-          <a:solidFill>
-            <a:srgbClr val="0B0C0C"/>
-          </a:solidFill>
-          <a:ln/>
-        </p:spPr>
-      </p:sp>
-      <p:sp>
-        <p:nvSpPr>
-          <p:cNvPr id="8" name="Text 6"/>
-          <p:cNvSpPr/>
-          <p:nvPr/>
-        </p:nvSpPr>
-        <p:spPr>
-          <a:xfrm>
-            <a:off x="9525000" y="1943100"/>
-            <a:ext cx="8633460" cy="457200"/>
-          </a:xfrm>
-          <a:prstGeom prst="rect">
-            <a:avLst/>
-          </a:prstGeom>
-          <a:noFill/>
-          <a:ln/>
-        </p:spPr>
-        <p:txBody>
-          <a:bodyPr wrap="square" lIns="25400" tIns="25400" rIns="25400" bIns="25400" rtlCol="0" anchor="t">
-            <a:normAutofit/>
-          </a:bodyPr>
-          <a:lstStyle/>
-          <a:p>
-            <a:pPr algn="l" indent="0" marL="0">
-              <a:buNone/>
-            </a:pPr>
-            <a:r>
-              <a:rPr lang="en-US" sz="2700" b="1" dirty="0">
+              <a:t>before-you-commit problem </a:t>
+            </a:r>
+            <a:pPr algn="l" indent="0" marL="0">
+              <a:lnSpc>
+                <a:spcPct val="117209"/>
+              </a:lnSpc>
+              <a:buNone/>
+            </a:pPr>
+            <a:r>
+              <a:rPr lang="en-US" sz="2700" dirty="0">
                 <a:solidFill>
                   <a:srgbClr val="0B0C0C"/>
                 </a:solidFill>
@@ -4680,7 +4784,7 @@
                 <a:ea typeface="Helvetica Neue" pitchFamily="34" charset="-122"/>
                 <a:cs typeface="Helvetica Neue" pitchFamily="34" charset="-120"/>
               </a:rPr>
-              <a:t>One interpretation</a:t>
+              <a:t>— where it's cheapest to fix</a:t>
             </a:r>
             <a:endParaRPr lang="en-US" sz="2700" dirty="0"/>
           </a:p>
@@ -4688,96 +4792,123 @@
       </p:sp>
       <p:sp>
         <p:nvSpPr>
-          <p:cNvPr id="9" name="Text 7"/>
-          <p:cNvSpPr/>
-          <p:nvPr/>
-        </p:nvSpPr>
-        <p:spPr>
-          <a:xfrm>
-            <a:off x="9525000" y="2495550"/>
-            <a:ext cx="8084058" cy="811411"/>
-          </a:xfrm>
-          <a:prstGeom prst="rect">
-            <a:avLst/>
-          </a:prstGeom>
-          <a:noFill/>
-          <a:ln/>
-        </p:spPr>
-        <p:txBody>
-          <a:bodyPr wrap="square" lIns="25400" tIns="25400" rIns="25400" bIns="25400" rtlCol="0" anchor="t">
-            <a:normAutofit/>
-          </a:bodyPr>
-          <a:lstStyle/>
-          <a:p>
-            <a:pPr algn="l" indent="0" marL="0">
-              <a:lnSpc>
-                <a:spcPct val="116000"/>
-              </a:lnSpc>
-              <a:buNone/>
-            </a:pPr>
-            <a:r>
-              <a:rPr lang="en-US" sz="2175" dirty="0">
-                <a:solidFill>
-                  <a:srgbClr val="3D4141"/>
+          <p:cNvPr id="6" name="Shape 4"/>
+          <p:cNvSpPr/>
+          <p:nvPr/>
+        </p:nvSpPr>
+        <p:spPr>
+          <a:xfrm>
+            <a:off x="914400" y="3198465"/>
+            <a:ext cx="190500" cy="190500"/>
+          </a:xfrm>
+          <a:prstGeom prst="roundRect">
+            <a:avLst>
+              <a:gd name="adj" fmla="val 30000"/>
+            </a:avLst>
+          </a:prstGeom>
+          <a:solidFill>
+            <a:srgbClr val="FFDD00"/>
+          </a:solidFill>
+          <a:ln/>
+        </p:spPr>
+      </p:sp>
+      <p:sp>
+        <p:nvSpPr>
+          <p:cNvPr id="7" name="Text 5"/>
+          <p:cNvSpPr/>
+          <p:nvPr/>
+        </p:nvSpPr>
+        <p:spPr>
+          <a:xfrm>
+            <a:off x="1371600" y="3046065"/>
+            <a:ext cx="11119984" cy="518145"/>
+          </a:xfrm>
+          <a:prstGeom prst="rect">
+            <a:avLst/>
+          </a:prstGeom>
+          <a:noFill/>
+          <a:ln/>
+        </p:spPr>
+        <p:txBody>
+          <a:bodyPr wrap="square" lIns="25400" tIns="25400" rIns="25400" bIns="25400" rtlCol="0" anchor="t">
+            <a:normAutofit/>
+          </a:bodyPr>
+          <a:lstStyle/>
+          <a:p>
+            <a:pPr algn="l" indent="0" marL="0">
+              <a:lnSpc>
+                <a:spcPct val="117209"/>
+              </a:lnSpc>
+              <a:buNone/>
+            </a:pPr>
+            <a:r>
+              <a:rPr lang="en-US" sz="2700" dirty="0">
+                <a:solidFill>
+                  <a:srgbClr val="0B0C0C"/>
                 </a:solidFill>
                 <a:latin typeface="Helvetica Neue" pitchFamily="34" charset="0"/>
                 <a:ea typeface="Helvetica Neue" pitchFamily="34" charset="-122"/>
                 <a:cs typeface="Helvetica Neue" pitchFamily="34" charset="-120"/>
               </a:rPr>
-              <a:t>A single shared clause map means teams stop diverging on interpretation.</a:t>
-            </a:r>
-            <a:endParaRPr lang="en-US" sz="2175" dirty="0"/>
-          </a:p>
-        </p:txBody>
-      </p:sp>
-      <p:sp>
-        <p:nvSpPr>
-          <p:cNvPr id="10" name="Shape 8"/>
-          <p:cNvSpPr/>
-          <p:nvPr/>
-        </p:nvSpPr>
-        <p:spPr>
-          <a:xfrm>
-            <a:off x="914400" y="3687961"/>
-            <a:ext cx="7848600" cy="38100"/>
-          </a:xfrm>
-          <a:prstGeom prst="rect">
-            <a:avLst/>
-          </a:prstGeom>
-          <a:solidFill>
-            <a:srgbClr val="0B0C0C"/>
-          </a:solidFill>
-          <a:ln/>
-        </p:spPr>
-      </p:sp>
-      <p:sp>
-        <p:nvSpPr>
-          <p:cNvPr id="11" name="Text 9"/>
-          <p:cNvSpPr/>
-          <p:nvPr/>
-        </p:nvSpPr>
-        <p:spPr>
-          <a:xfrm>
-            <a:off x="914400" y="3954661"/>
-            <a:ext cx="8633460" cy="457200"/>
-          </a:xfrm>
-          <a:prstGeom prst="rect">
-            <a:avLst/>
-          </a:prstGeom>
-          <a:noFill/>
-          <a:ln/>
-        </p:spPr>
-        <p:txBody>
-          <a:bodyPr wrap="square" lIns="25400" tIns="25400" rIns="25400" bIns="25400" rtlCol="0" anchor="t">
-            <a:normAutofit/>
-          </a:bodyPr>
-          <a:lstStyle/>
-          <a:p>
-            <a:pPr algn="l" indent="0" marL="0">
-              <a:buNone/>
-            </a:pPr>
-            <a:r>
-              <a:rPr lang="en-US" sz="2700" b="1" dirty="0">
+              <a:t>One shared clause map, so teams stop diverging on interpretation</a:t>
+            </a:r>
+            <a:endParaRPr lang="en-US" sz="2700" dirty="0"/>
+          </a:p>
+        </p:txBody>
+      </p:sp>
+      <p:sp>
+        <p:nvSpPr>
+          <p:cNvPr id="8" name="Shape 6"/>
+          <p:cNvSpPr/>
+          <p:nvPr/>
+        </p:nvSpPr>
+        <p:spPr>
+          <a:xfrm>
+            <a:off x="914400" y="4059510"/>
+            <a:ext cx="190500" cy="190500"/>
+          </a:xfrm>
+          <a:prstGeom prst="roundRect">
+            <a:avLst>
+              <a:gd name="adj" fmla="val 30000"/>
+            </a:avLst>
+          </a:prstGeom>
+          <a:solidFill>
+            <a:srgbClr val="B1CC33"/>
+          </a:solidFill>
+          <a:ln/>
+        </p:spPr>
+      </p:sp>
+      <p:sp>
+        <p:nvSpPr>
+          <p:cNvPr id="9" name="Text 7"/>
+          <p:cNvSpPr/>
+          <p:nvPr/>
+        </p:nvSpPr>
+        <p:spPr>
+          <a:xfrm>
+            <a:off x="1371600" y="3907110"/>
+            <a:ext cx="15000506" cy="518145"/>
+          </a:xfrm>
+          <a:prstGeom prst="rect">
+            <a:avLst/>
+          </a:prstGeom>
+          <a:noFill/>
+          <a:ln/>
+        </p:spPr>
+        <p:txBody>
+          <a:bodyPr wrap="square" lIns="25400" tIns="25400" rIns="25400" bIns="25400" rtlCol="0" anchor="t">
+            <a:normAutofit/>
+          </a:bodyPr>
+          <a:lstStyle/>
+          <a:p>
+            <a:pPr algn="l" indent="0" marL="0">
+              <a:lnSpc>
+                <a:spcPct val="117209"/>
+              </a:lnSpc>
+              <a:buNone/>
+            </a:pPr>
+            <a:r>
+              <a:rPr lang="en-US" sz="2700" dirty="0">
                 <a:solidFill>
                   <a:srgbClr val="0B0C0C"/>
                 </a:solidFill>
@@ -4785,7 +4916,7 @@
                 <a:ea typeface="Helvetica Neue" pitchFamily="34" charset="-122"/>
                 <a:cs typeface="Helvetica Neue" pitchFamily="34" charset="-120"/>
               </a:rPr>
-              <a:t>Coaching, inline</a:t>
+              <a:t>Juniors get the clause and the fix inline, instead of red-pen feedback in review comments</a:t>
             </a:r>
             <a:endParaRPr lang="en-US" sz="2700" dirty="0"/>
           </a:p>
@@ -4793,104 +4924,65 @@
       </p:sp>
       <p:sp>
         <p:nvSpPr>
-          <p:cNvPr id="12" name="Text 10"/>
-          <p:cNvSpPr/>
-          <p:nvPr/>
-        </p:nvSpPr>
-        <p:spPr>
-          <a:xfrm>
-            <a:off x="914400" y="4507111"/>
-            <a:ext cx="8084058" cy="811411"/>
-          </a:xfrm>
-          <a:prstGeom prst="rect">
-            <a:avLst/>
-          </a:prstGeom>
-          <a:noFill/>
-          <a:ln/>
-        </p:spPr>
-        <p:txBody>
-          <a:bodyPr wrap="square" lIns="25400" tIns="25400" rIns="25400" bIns="25400" rtlCol="0" anchor="t">
-            <a:normAutofit/>
-          </a:bodyPr>
-          <a:lstStyle/>
-          <a:p>
-            <a:pPr algn="l" indent="0" marL="0">
-              <a:lnSpc>
-                <a:spcPct val="116000"/>
-              </a:lnSpc>
-              <a:buNone/>
-            </a:pPr>
-            <a:r>
-              <a:rPr lang="en-US" sz="2175" dirty="0">
-                <a:solidFill>
-                  <a:srgbClr val="3D4141"/>
+          <p:cNvPr id="10" name="Shape 8"/>
+          <p:cNvSpPr/>
+          <p:nvPr/>
+        </p:nvSpPr>
+        <p:spPr>
+          <a:xfrm>
+            <a:off x="914400" y="4920555"/>
+            <a:ext cx="190500" cy="190500"/>
+          </a:xfrm>
+          <a:prstGeom prst="roundRect">
+            <a:avLst>
+              <a:gd name="adj" fmla="val 30000"/>
+            </a:avLst>
+          </a:prstGeom>
+          <a:solidFill>
+            <a:srgbClr val="B1CC33"/>
+          </a:solidFill>
+          <a:ln/>
+        </p:spPr>
+      </p:sp>
+      <p:sp>
+        <p:nvSpPr>
+          <p:cNvPr id="11" name="Text 9"/>
+          <p:cNvSpPr/>
+          <p:nvPr/>
+        </p:nvSpPr>
+        <p:spPr>
+          <a:xfrm>
+            <a:off x="1371600" y="4768155"/>
+            <a:ext cx="12666479" cy="518145"/>
+          </a:xfrm>
+          <a:prstGeom prst="rect">
+            <a:avLst/>
+          </a:prstGeom>
+          <a:noFill/>
+          <a:ln/>
+        </p:spPr>
+        <p:txBody>
+          <a:bodyPr wrap="square" lIns="25400" tIns="25400" rIns="25400" bIns="25400" rtlCol="0" anchor="t">
+            <a:normAutofit/>
+          </a:bodyPr>
+          <a:lstStyle/>
+          <a:p>
+            <a:pPr algn="l" indent="0" marL="0">
+              <a:lnSpc>
+                <a:spcPct val="117209"/>
+              </a:lnSpc>
+              <a:buNone/>
+            </a:pPr>
+            <a:r>
+              <a:rPr lang="en-US" sz="2700" dirty="0">
+                <a:solidFill>
+                  <a:srgbClr val="0B0C0C"/>
                 </a:solidFill>
                 <a:latin typeface="Helvetica Neue" pitchFamily="34" charset="0"/>
                 <a:ea typeface="Helvetica Neue" pitchFamily="34" charset="-122"/>
                 <a:cs typeface="Helvetica Neue" pitchFamily="34" charset="-120"/>
               </a:rPr>
-              <a:t>Juniors get the clause and the fix as they work, not red-pen feedback in review.</a:t>
-            </a:r>
-            <a:endParaRPr lang="en-US" sz="2175" dirty="0"/>
-          </a:p>
-        </p:txBody>
-      </p:sp>
-      <p:sp>
-        <p:nvSpPr>
-          <p:cNvPr id="13" name="Shape 11"/>
-          <p:cNvSpPr/>
-          <p:nvPr/>
-        </p:nvSpPr>
-        <p:spPr>
-          <a:xfrm>
-            <a:off x="9525000" y="3687961"/>
-            <a:ext cx="7848600" cy="38100"/>
-          </a:xfrm>
-          <a:prstGeom prst="rect">
-            <a:avLst/>
-          </a:prstGeom>
-          <a:solidFill>
-            <a:srgbClr val="0B0C0C"/>
-          </a:solidFill>
-          <a:ln/>
-        </p:spPr>
-      </p:sp>
-      <p:sp>
-        <p:nvSpPr>
-          <p:cNvPr id="14" name="Text 12"/>
-          <p:cNvSpPr/>
-          <p:nvPr/>
-        </p:nvSpPr>
-        <p:spPr>
-          <a:xfrm>
-            <a:off x="9525000" y="3954661"/>
-            <a:ext cx="8633460" cy="457200"/>
-          </a:xfrm>
-          <a:prstGeom prst="rect">
-            <a:avLst/>
-          </a:prstGeom>
-          <a:noFill/>
-          <a:ln/>
-        </p:spPr>
-        <p:txBody>
-          <a:bodyPr wrap="square" lIns="25400" tIns="25400" rIns="25400" bIns="25400" rtlCol="0" anchor="t">
-            <a:normAutofit/>
-          </a:bodyPr>
-          <a:lstStyle/>
-          <a:p>
-            <a:pPr algn="l" indent="0" marL="0">
-              <a:buNone/>
-            </a:pPr>
-            <a:r>
-              <a:rPr lang="en-US" sz="2700" b="1" dirty="0">
-                <a:solidFill>
-                  <a:srgbClr val="0B0C0C"/>
-                </a:solidFill>
-                <a:latin typeface="Helvetica Neue" pitchFamily="34" charset="0"/>
-                <a:ea typeface="Helvetica Neue" pitchFamily="34" charset="-122"/>
-                <a:cs typeface="Helvetica Neue" pitchFamily="34" charset="-120"/>
-              </a:rPr>
-              <a:t>Answerable</a:t>
+              <a:t>Every run emits telemetry, so "did the check actually run" has a real answer</a:t>
             </a:r>
             <a:endParaRPr lang="en-US" sz="2700" dirty="0"/>
           </a:p>
@@ -4898,62 +4990,18 @@
       </p:sp>
       <p:sp>
         <p:nvSpPr>
-          <p:cNvPr id="15" name="Text 13"/>
-          <p:cNvSpPr/>
-          <p:nvPr/>
-        </p:nvSpPr>
-        <p:spPr>
-          <a:xfrm>
-            <a:off x="9525000" y="4507111"/>
-            <a:ext cx="8084058" cy="811411"/>
-          </a:xfrm>
-          <a:prstGeom prst="rect">
-            <a:avLst/>
-          </a:prstGeom>
-          <a:noFill/>
-          <a:ln/>
-        </p:spPr>
-        <p:txBody>
-          <a:bodyPr wrap="square" lIns="25400" tIns="25400" rIns="25400" bIns="25400" rtlCol="0" anchor="t">
-            <a:normAutofit/>
-          </a:bodyPr>
-          <a:lstStyle/>
-          <a:p>
-            <a:pPr algn="l" indent="0" marL="0">
-              <a:lnSpc>
-                <a:spcPct val="116000"/>
-              </a:lnSpc>
-              <a:buNone/>
-            </a:pPr>
-            <a:r>
-              <a:rPr lang="en-US" sz="2175" dirty="0">
-                <a:solidFill>
-                  <a:srgbClr val="3D4141"/>
-                </a:solidFill>
-                <a:latin typeface="Helvetica Neue" pitchFamily="34" charset="0"/>
-                <a:ea typeface="Helvetica Neue" pitchFamily="34" charset="-122"/>
-                <a:cs typeface="Helvetica Neue" pitchFamily="34" charset="-120"/>
-              </a:rPr>
-              <a:t>Every run emits telemetry, so "did the check actually run" has a real answer.</a:t>
-            </a:r>
-            <a:endParaRPr lang="en-US" sz="2175" dirty="0"/>
-          </a:p>
-        </p:txBody>
-      </p:sp>
-      <p:sp>
-        <p:nvSpPr>
-          <p:cNvPr id="16" name="Shape 14"/>
-          <p:cNvSpPr/>
-          <p:nvPr/>
-        </p:nvSpPr>
-        <p:spPr>
-          <a:xfrm>
-            <a:off x="914400" y="6424613"/>
-            <a:ext cx="16459200" cy="2947988"/>
+          <p:cNvPr id="12" name="Shape 10"/>
+          <p:cNvSpPr/>
+          <p:nvPr/>
+        </p:nvSpPr>
+        <p:spPr>
+          <a:xfrm>
+            <a:off x="914400" y="5857801"/>
+            <a:ext cx="16459200" cy="2938463"/>
           </a:xfrm>
           <a:prstGeom prst="roundRect">
             <a:avLst>
-              <a:gd name="adj" fmla="val 7754"/>
+              <a:gd name="adj" fmla="val 7780"/>
             </a:avLst>
           </a:prstGeom>
           <a:solidFill>
@@ -4964,14 +5012,14 @@
       </p:sp>
       <p:sp>
         <p:nvSpPr>
-          <p:cNvPr id="17" name="Text 15"/>
-          <p:cNvSpPr/>
-          <p:nvPr/>
-        </p:nvSpPr>
-        <p:spPr>
-          <a:xfrm>
-            <a:off x="1485900" y="6919913"/>
-            <a:ext cx="16847820" cy="342900"/>
+          <p:cNvPr id="13" name="Text 11"/>
+          <p:cNvSpPr/>
+          <p:nvPr/>
+        </p:nvSpPr>
+        <p:spPr>
+          <a:xfrm>
+            <a:off x="1485900" y="6353101"/>
+            <a:ext cx="16847820" cy="333375"/>
           </a:xfrm>
           <a:prstGeom prst="rect">
             <a:avLst/>
@@ -5005,13 +5053,13 @@
       </p:sp>
       <p:sp>
         <p:nvSpPr>
-          <p:cNvPr id="18" name="Text 16"/>
-          <p:cNvSpPr/>
-          <p:nvPr/>
-        </p:nvSpPr>
-        <p:spPr>
-          <a:xfrm>
-            <a:off x="1485900" y="7377113"/>
+          <p:cNvPr id="14" name="Text 12"/>
+          <p:cNvSpPr/>
+          <p:nvPr/>
+        </p:nvSpPr>
+        <p:spPr>
+          <a:xfrm>
+            <a:off x="1485900" y="6800776"/>
             <a:ext cx="10080392" cy="1538288"/>
           </a:xfrm>
           <a:prstGeom prst="rect">
@@ -5104,7 +5152,7 @@
           <a:p>
             <a:pPr algn="l" indent="0" marL="0">
               <a:lnSpc>
-                <a:spcPct val="82474"/>
+                <a:spcPct val="81633"/>
               </a:lnSpc>
               <a:buNone/>
             </a:pPr>
@@ -5131,7 +5179,7 @@
         </p:nvSpPr>
         <p:spPr>
           <a:xfrm>
-            <a:off x="914400" y="2266950"/>
+            <a:off x="914400" y="2362200"/>
             <a:ext cx="190500" cy="190500"/>
           </a:xfrm>
           <a:prstGeom prst="roundRect">
@@ -5153,8 +5201,8 @@
         </p:nvSpPr>
         <p:spPr>
           <a:xfrm>
-            <a:off x="1371600" y="2133600"/>
-            <a:ext cx="7613142" cy="998041"/>
+            <a:off x="1371600" y="2209800"/>
+            <a:ext cx="7613142" cy="998190"/>
           </a:xfrm>
           <a:prstGeom prst="rect">
             <a:avLst/>
@@ -5217,7 +5265,7 @@
                 <a:ea typeface="Helvetica Neue" pitchFamily="34" charset="-122"/>
                 <a:cs typeface="Helvetica Neue" pitchFamily="34" charset="-120"/>
               </a:rPr>
-              <a:t>, so the same checks run on every pull request as annotations.</a:t>
+              <a:t>, so the same checks run on every pull request as annotations</a:t>
             </a:r>
             <a:endParaRPr lang="en-US" sz="2700" dirty="0"/>
           </a:p>
@@ -5231,7 +5279,7 @@
         </p:nvSpPr>
         <p:spPr>
           <a:xfrm>
-            <a:off x="914400" y="3645991"/>
+            <a:off x="914400" y="3665190"/>
             <a:ext cx="190500" cy="190500"/>
           </a:xfrm>
           <a:prstGeom prst="roundRect">
@@ -5253,8 +5301,8 @@
         </p:nvSpPr>
         <p:spPr>
           <a:xfrm>
-            <a:off x="1371600" y="3512641"/>
-            <a:ext cx="7613142" cy="998041"/>
+            <a:off x="1371600" y="3512790"/>
+            <a:ext cx="7613142" cy="998190"/>
           </a:xfrm>
           <a:prstGeom prst="rect">
             <a:avLst/>
@@ -5300,7 +5348,7 @@
                 <a:ea typeface="Helvetica Neue" pitchFamily="34" charset="-122"/>
                 <a:cs typeface="Helvetica Neue" pitchFamily="34" charset="-120"/>
               </a:rPr>
-              <a:t>The v1 ceiling is the whole GDS standard, not the subset we shipped this week.</a:t>
+              <a:t>The v1 ceiling is the whole GDS standard, not the subset we shipped this week</a:t>
             </a:r>
             <a:endParaRPr lang="en-US" sz="2700" dirty="0"/>
           </a:p>
@@ -5314,7 +5362,7 @@
         </p:nvSpPr>
         <p:spPr>
           <a:xfrm>
-            <a:off x="914400" y="5025033"/>
+            <a:off x="914400" y="4968180"/>
             <a:ext cx="190500" cy="190500"/>
           </a:xfrm>
           <a:prstGeom prst="roundRect">
@@ -5336,8 +5384,8 @@
         </p:nvSpPr>
         <p:spPr>
           <a:xfrm>
-            <a:off x="1371600" y="4891683"/>
-            <a:ext cx="7613142" cy="998041"/>
+            <a:off x="1371600" y="4815780"/>
+            <a:ext cx="7613142" cy="998190"/>
           </a:xfrm>
           <a:prstGeom prst="rect">
             <a:avLst/>
@@ -5400,7 +5448,7 @@
                 <a:ea typeface="Helvetica Neue" pitchFamily="34" charset="-122"/>
                 <a:cs typeface="Helvetica Neue" pitchFamily="34" charset="-120"/>
               </a:rPr>
-              <a:t>that gov teams contribute back to.</a:t>
+              <a:t>that gov teams contribute back to</a:t>
             </a:r>
             <a:endParaRPr lang="en-US" sz="2700" dirty="0"/>
           </a:p>
@@ -5408,39 +5456,139 @@
       </p:sp>
       <p:sp>
         <p:nvSpPr>
-          <p:cNvPr id="9" name="Text 7"/>
-          <p:cNvSpPr/>
-          <p:nvPr/>
-        </p:nvSpPr>
-        <p:spPr>
-          <a:xfrm>
-            <a:off x="914400" y="9067800"/>
-            <a:ext cx="8633460" cy="342900"/>
-          </a:xfrm>
-          <a:prstGeom prst="rect">
-            <a:avLst/>
-          </a:prstGeom>
-          <a:noFill/>
-          <a:ln/>
-        </p:spPr>
-        <p:txBody>
-          <a:bodyPr wrap="square" lIns="25400" tIns="25400" rIns="25400" bIns="25400" rtlCol="0" anchor="t">
-            <a:normAutofit/>
-          </a:bodyPr>
-          <a:lstStyle/>
-          <a:p>
-            <a:pPr algn="l" indent="0" marL="0">
-              <a:buNone/>
-            </a:pPr>
-            <a:r>
-              <a:rPr lang="en-US" sz="1950" dirty="0">
-                <a:solidFill>
-                  <a:srgbClr val="6B6F6F"/>
+          <p:cNvPr id="9" name="Shape 7"/>
+          <p:cNvSpPr/>
+          <p:nvPr/>
+        </p:nvSpPr>
+        <p:spPr>
+          <a:xfrm>
+            <a:off x="914400" y="6271171"/>
+            <a:ext cx="190500" cy="190500"/>
+          </a:xfrm>
+          <a:prstGeom prst="roundRect">
+            <a:avLst>
+              <a:gd name="adj" fmla="val 30000"/>
+            </a:avLst>
+          </a:prstGeom>
+          <a:solidFill>
+            <a:srgbClr val="B1CC33"/>
+          </a:solidFill>
+          <a:ln/>
+        </p:spPr>
+      </p:sp>
+      <p:sp>
+        <p:nvSpPr>
+          <p:cNvPr id="10" name="Text 8"/>
+          <p:cNvSpPr/>
+          <p:nvPr/>
+        </p:nvSpPr>
+        <p:spPr>
+          <a:xfrm>
+            <a:off x="1371600" y="6118771"/>
+            <a:ext cx="7613142" cy="1478235"/>
+          </a:xfrm>
+          <a:prstGeom prst="rect">
+            <a:avLst/>
+          </a:prstGeom>
+          <a:noFill/>
+          <a:ln/>
+        </p:spPr>
+        <p:txBody>
+          <a:bodyPr wrap="square" lIns="25400" tIns="25400" rIns="25400" bIns="25400" rtlCol="0" anchor="t">
+            <a:normAutofit/>
+          </a:bodyPr>
+          <a:lstStyle/>
+          <a:p>
+            <a:pPr algn="l" indent="0" marL="0">
+              <a:lnSpc>
+                <a:spcPct val="117209"/>
+              </a:lnSpc>
+              <a:buNone/>
+            </a:pPr>
+            <a:r>
+              <a:rPr lang="en-US" sz="2700" dirty="0">
+                <a:solidFill>
+                  <a:srgbClr val="0B0C0C"/>
                 </a:solidFill>
                 <a:latin typeface="Helvetica Neue" pitchFamily="34" charset="0"/>
                 <a:ea typeface="Helvetica Neue" pitchFamily="34" charset="-122"/>
                 <a:cs typeface="Helvetica Neue" pitchFamily="34" charset="-120"/>
               </a:rPr>
+              <a:t>A </a:t>
+            </a:r>
+            <a:pPr algn="l" indent="0" marL="0">
+              <a:lnSpc>
+                <a:spcPct val="117209"/>
+              </a:lnSpc>
+              <a:buNone/>
+            </a:pPr>
+            <a:r>
+              <a:rPr lang="en-US" sz="2700" b="1" dirty="0">
+                <a:solidFill>
+                  <a:srgbClr val="0B0C0C"/>
+                </a:solidFill>
+                <a:latin typeface="Helvetica Neue" pitchFamily="34" charset="0"/>
+                <a:ea typeface="Helvetica Neue" pitchFamily="34" charset="-122"/>
+                <a:cs typeface="Helvetica Neue" pitchFamily="34" charset="-120"/>
+              </a:rPr>
+              <a:t>VS Code extension </a:t>
+            </a:r>
+            <a:pPr algn="l" indent="0" marL="0">
+              <a:lnSpc>
+                <a:spcPct val="117209"/>
+              </a:lnSpc>
+              <a:buNone/>
+            </a:pPr>
+            <a:r>
+              <a:rPr lang="en-US" sz="2700" dirty="0">
+                <a:solidFill>
+                  <a:srgbClr val="0B0C0C"/>
+                </a:solidFill>
+                <a:latin typeface="Helvetica Neue" pitchFamily="34" charset="0"/>
+                <a:ea typeface="Helvetica Neue" pitchFamily="34" charset="-122"/>
+                <a:cs typeface="Helvetica Neue" pitchFamily="34" charset="-120"/>
+              </a:rPr>
+              <a:t>, so findings surface as squigglies in the editor before the commit hook ever fires</a:t>
+            </a:r>
+            <a:endParaRPr lang="en-US" sz="2700" dirty="0"/>
+          </a:p>
+        </p:txBody>
+      </p:sp>
+      <p:sp>
+        <p:nvSpPr>
+          <p:cNvPr id="11" name="Text 9"/>
+          <p:cNvSpPr/>
+          <p:nvPr/>
+        </p:nvSpPr>
+        <p:spPr>
+          <a:xfrm>
+            <a:off x="914400" y="9053513"/>
+            <a:ext cx="8633460" cy="357188"/>
+          </a:xfrm>
+          <a:prstGeom prst="rect">
+            <a:avLst/>
+          </a:prstGeom>
+          <a:noFill/>
+          <a:ln/>
+        </p:spPr>
+        <p:txBody>
+          <a:bodyPr wrap="square" lIns="25400" tIns="25400" rIns="25400" bIns="25400" rtlCol="0" anchor="t">
+            <a:normAutofit/>
+          </a:bodyPr>
+          <a:lstStyle/>
+          <a:p>
+            <a:pPr algn="l" indent="0" marL="0">
+              <a:buNone/>
+            </a:pPr>
+            <a:r>
+              <a:rPr lang="en-US" sz="1950" dirty="0">
+                <a:solidFill>
+                  <a:srgbClr val="6B6F6F"/>
+                </a:solidFill>
+                <a:latin typeface="Courier New" pitchFamily="34" charset="0"/>
+                <a:ea typeface="Courier New" pitchFamily="34" charset="-122"/>
+                <a:cs typeface="Courier New" pitchFamily="34" charset="-120"/>
+              </a:rPr>
               <a:t>Thanks — questions welcome.</a:t>
             </a:r>
             <a:endParaRPr lang="en-US" sz="1950" dirty="0"/>
@@ -5449,7 +5597,7 @@
       </p:sp>
       <p:sp>
         <p:nvSpPr>
-          <p:cNvPr id="10" name="Shape 8"/>
+          <p:cNvPr id="12" name="Shape 10"/>
           <p:cNvSpPr/>
           <p:nvPr/>
         </p:nvSpPr>
@@ -5471,14 +5619,14 @@
       </p:sp>
       <p:sp>
         <p:nvSpPr>
-          <p:cNvPr id="11" name="Text 9"/>
+          <p:cNvPr id="13" name="Text 11"/>
           <p:cNvSpPr/>
           <p:nvPr/>
         </p:nvSpPr>
         <p:spPr>
           <a:xfrm>
             <a:off x="10134600" y="1524000"/>
-            <a:ext cx="7292340" cy="342900"/>
+            <a:ext cx="7292340" cy="333375"/>
           </a:xfrm>
           <a:prstGeom prst="rect">
             <a:avLst/>
@@ -5512,14 +5660,36 @@
       </p:sp>
       <p:sp>
         <p:nvSpPr>
-          <p:cNvPr id="12" name="Text 10"/>
-          <p:cNvSpPr/>
-          <p:nvPr/>
-        </p:nvSpPr>
-        <p:spPr>
-          <a:xfrm>
-            <a:off x="10134600" y="2171700"/>
-            <a:ext cx="438150" cy="508546"/>
+          <p:cNvPr id="14" name="Shape 12"/>
+          <p:cNvSpPr/>
+          <p:nvPr/>
+        </p:nvSpPr>
+        <p:spPr>
+          <a:xfrm>
+            <a:off x="10134600" y="2295525"/>
+            <a:ext cx="190500" cy="190500"/>
+          </a:xfrm>
+          <a:prstGeom prst="roundRect">
+            <a:avLst>
+              <a:gd name="adj" fmla="val 30000"/>
+            </a:avLst>
+          </a:prstGeom>
+          <a:solidFill>
+            <a:srgbClr val="F499C6"/>
+          </a:solidFill>
+          <a:ln/>
+        </p:spPr>
+      </p:sp>
+      <p:sp>
+        <p:nvSpPr>
+          <p:cNvPr id="15" name="Text 13"/>
+          <p:cNvSpPr/>
+          <p:nvPr/>
+        </p:nvSpPr>
+        <p:spPr>
+          <a:xfrm>
+            <a:off x="10553700" y="2162175"/>
+            <a:ext cx="2964232" cy="508620"/>
           </a:xfrm>
           <a:prstGeom prst="rect">
             <a:avLst/>
@@ -5542,13 +5712,13 @@
             <a:r>
               <a:rPr lang="en-US" sz="2850" dirty="0">
                 <a:solidFill>
-                  <a:srgbClr val="F499C6"/>
+                  <a:srgbClr val="F2F4F4"/>
                 </a:solidFill>
                 <a:latin typeface="Helvetica Neue" pitchFamily="34" charset="0"/>
                 <a:ea typeface="Helvetica Neue" pitchFamily="34" charset="-122"/>
                 <a:cs typeface="Helvetica Neue" pitchFamily="34" charset="-120"/>
               </a:rPr>
-              <a:t>—</a:t>
+              <a:t>A hosted service</a:t>
             </a:r>
             <a:endParaRPr lang="en-US" sz="2850" dirty="0"/>
           </a:p>
@@ -5556,14 +5726,36 @@
       </p:sp>
       <p:sp>
         <p:nvSpPr>
-          <p:cNvPr id="13" name="Text 11"/>
-          <p:cNvSpPr/>
-          <p:nvPr/>
-        </p:nvSpPr>
-        <p:spPr>
-          <a:xfrm>
-            <a:off x="10725150" y="2171700"/>
-            <a:ext cx="2964314" cy="508546"/>
+          <p:cNvPr id="16" name="Shape 14"/>
+          <p:cNvSpPr/>
+          <p:nvPr/>
+        </p:nvSpPr>
+        <p:spPr>
+          <a:xfrm>
+            <a:off x="10134600" y="3032745"/>
+            <a:ext cx="190500" cy="190500"/>
+          </a:xfrm>
+          <a:prstGeom prst="roundRect">
+            <a:avLst>
+              <a:gd name="adj" fmla="val 30000"/>
+            </a:avLst>
+          </a:prstGeom>
+          <a:solidFill>
+            <a:srgbClr val="F499C6"/>
+          </a:solidFill>
+          <a:ln/>
+        </p:spPr>
+      </p:sp>
+      <p:sp>
+        <p:nvSpPr>
+          <p:cNvPr id="17" name="Text 15"/>
+          <p:cNvSpPr/>
+          <p:nvPr/>
+        </p:nvSpPr>
+        <p:spPr>
+          <a:xfrm>
+            <a:off x="10553700" y="2899395"/>
+            <a:ext cx="827261" cy="508620"/>
           </a:xfrm>
           <a:prstGeom prst="rect">
             <a:avLst/>
@@ -5592,7 +5784,7 @@
                 <a:ea typeface="Helvetica Neue" pitchFamily="34" charset="-122"/>
                 <a:cs typeface="Helvetica Neue" pitchFamily="34" charset="-120"/>
               </a:rPr>
-              <a:t>A hosted service</a:t>
+              <a:t>Auth</a:t>
             </a:r>
             <a:endParaRPr lang="en-US" sz="2850" dirty="0"/>
           </a:p>
@@ -5600,14 +5792,36 @@
       </p:sp>
       <p:sp>
         <p:nvSpPr>
-          <p:cNvPr id="14" name="Text 12"/>
-          <p:cNvSpPr/>
-          <p:nvPr/>
-        </p:nvSpPr>
-        <p:spPr>
-          <a:xfrm>
-            <a:off x="10134600" y="2870746"/>
-            <a:ext cx="438150" cy="508546"/>
+          <p:cNvPr id="18" name="Shape 16"/>
+          <p:cNvSpPr/>
+          <p:nvPr/>
+        </p:nvSpPr>
+        <p:spPr>
+          <a:xfrm>
+            <a:off x="10134600" y="3769965"/>
+            <a:ext cx="190500" cy="190500"/>
+          </a:xfrm>
+          <a:prstGeom prst="roundRect">
+            <a:avLst>
+              <a:gd name="adj" fmla="val 30000"/>
+            </a:avLst>
+          </a:prstGeom>
+          <a:solidFill>
+            <a:srgbClr val="F499C6"/>
+          </a:solidFill>
+          <a:ln/>
+        </p:spPr>
+      </p:sp>
+      <p:sp>
+        <p:nvSpPr>
+          <p:cNvPr id="19" name="Text 17"/>
+          <p:cNvSpPr/>
+          <p:nvPr/>
+        </p:nvSpPr>
+        <p:spPr>
+          <a:xfrm>
+            <a:off x="10553700" y="3636615"/>
+            <a:ext cx="2279020" cy="508620"/>
           </a:xfrm>
           <a:prstGeom prst="rect">
             <a:avLst/>
@@ -5630,13 +5844,13 @@
             <a:r>
               <a:rPr lang="en-US" sz="2850" dirty="0">
                 <a:solidFill>
-                  <a:srgbClr val="F499C6"/>
+                  <a:srgbClr val="F2F4F4"/>
                 </a:solidFill>
                 <a:latin typeface="Helvetica Neue" pitchFamily="34" charset="0"/>
                 <a:ea typeface="Helvetica Neue" pitchFamily="34" charset="-122"/>
                 <a:cs typeface="Helvetica Neue" pitchFamily="34" charset="-120"/>
               </a:rPr>
-              <a:t>—</a:t>
+              <a:t>A dashboard</a:t>
             </a:r>
             <a:endParaRPr lang="en-US" sz="2850" dirty="0"/>
           </a:p>
@@ -5644,14 +5858,36 @@
       </p:sp>
       <p:sp>
         <p:nvSpPr>
-          <p:cNvPr id="15" name="Text 13"/>
-          <p:cNvSpPr/>
-          <p:nvPr/>
-        </p:nvSpPr>
-        <p:spPr>
-          <a:xfrm>
-            <a:off x="10725150" y="2870746"/>
-            <a:ext cx="827336" cy="508546"/>
+          <p:cNvPr id="20" name="Shape 18"/>
+          <p:cNvSpPr/>
+          <p:nvPr/>
+        </p:nvSpPr>
+        <p:spPr>
+          <a:xfrm>
+            <a:off x="10134600" y="4507185"/>
+            <a:ext cx="190500" cy="190500"/>
+          </a:xfrm>
+          <a:prstGeom prst="roundRect">
+            <a:avLst>
+              <a:gd name="adj" fmla="val 30000"/>
+            </a:avLst>
+          </a:prstGeom>
+          <a:solidFill>
+            <a:srgbClr val="F499C6"/>
+          </a:solidFill>
+          <a:ln/>
+        </p:spPr>
+      </p:sp>
+      <p:sp>
+        <p:nvSpPr>
+          <p:cNvPr id="21" name="Text 19"/>
+          <p:cNvSpPr/>
+          <p:nvPr/>
+        </p:nvSpPr>
+        <p:spPr>
+          <a:xfrm>
+            <a:off x="10553700" y="4373835"/>
+            <a:ext cx="3636265" cy="508620"/>
           </a:xfrm>
           <a:prstGeom prst="rect">
             <a:avLst/>
@@ -5680,7 +5916,7 @@
                 <a:ea typeface="Helvetica Neue" pitchFamily="34" charset="-122"/>
                 <a:cs typeface="Helvetica Neue" pitchFamily="34" charset="-120"/>
               </a:rPr>
-              <a:t>Auth</a:t>
+              <a:t>An auto-apply mode</a:t>
             </a:r>
             <a:endParaRPr lang="en-US" sz="2850" dirty="0"/>
           </a:p>
@@ -5688,189 +5924,13 @@
       </p:sp>
       <p:sp>
         <p:nvSpPr>
-          <p:cNvPr id="16" name="Text 14"/>
-          <p:cNvSpPr/>
-          <p:nvPr/>
-        </p:nvSpPr>
-        <p:spPr>
-          <a:xfrm>
-            <a:off x="10134600" y="3569791"/>
-            <a:ext cx="438150" cy="508546"/>
-          </a:xfrm>
-          <a:prstGeom prst="rect">
-            <a:avLst/>
-          </a:prstGeom>
-          <a:noFill/>
-          <a:ln/>
-        </p:spPr>
-        <p:txBody>
-          <a:bodyPr wrap="square" lIns="25400" tIns="25400" rIns="25400" bIns="25400" rtlCol="0" anchor="t">
-            <a:normAutofit/>
-          </a:bodyPr>
-          <a:lstStyle/>
-          <a:p>
-            <a:pPr algn="l" indent="0" marL="0">
-              <a:lnSpc>
-                <a:spcPct val="109778"/>
-              </a:lnSpc>
-              <a:buNone/>
-            </a:pPr>
-            <a:r>
-              <a:rPr lang="en-US" sz="2850" dirty="0">
-                <a:solidFill>
-                  <a:srgbClr val="F499C6"/>
-                </a:solidFill>
-                <a:latin typeface="Helvetica Neue" pitchFamily="34" charset="0"/>
-                <a:ea typeface="Helvetica Neue" pitchFamily="34" charset="-122"/>
-                <a:cs typeface="Helvetica Neue" pitchFamily="34" charset="-120"/>
-              </a:rPr>
-              <a:t>—</a:t>
-            </a:r>
-            <a:endParaRPr lang="en-US" sz="2850" dirty="0"/>
-          </a:p>
-        </p:txBody>
-      </p:sp>
-      <p:sp>
-        <p:nvSpPr>
-          <p:cNvPr id="17" name="Text 15"/>
-          <p:cNvSpPr/>
-          <p:nvPr/>
-        </p:nvSpPr>
-        <p:spPr>
-          <a:xfrm>
-            <a:off x="10725150" y="3569791"/>
-            <a:ext cx="2279020" cy="508546"/>
-          </a:xfrm>
-          <a:prstGeom prst="rect">
-            <a:avLst/>
-          </a:prstGeom>
-          <a:noFill/>
-          <a:ln/>
-        </p:spPr>
-        <p:txBody>
-          <a:bodyPr wrap="square" lIns="25400" tIns="25400" rIns="25400" bIns="25400" rtlCol="0" anchor="t">
-            <a:normAutofit/>
-          </a:bodyPr>
-          <a:lstStyle/>
-          <a:p>
-            <a:pPr algn="l" indent="0" marL="0">
-              <a:lnSpc>
-                <a:spcPct val="109778"/>
-              </a:lnSpc>
-              <a:buNone/>
-            </a:pPr>
-            <a:r>
-              <a:rPr lang="en-US" sz="2850" dirty="0">
-                <a:solidFill>
-                  <a:srgbClr val="F2F4F4"/>
-                </a:solidFill>
-                <a:latin typeface="Helvetica Neue" pitchFamily="34" charset="0"/>
-                <a:ea typeface="Helvetica Neue" pitchFamily="34" charset="-122"/>
-                <a:cs typeface="Helvetica Neue" pitchFamily="34" charset="-120"/>
-              </a:rPr>
-              <a:t>A dashboard</a:t>
-            </a:r>
-            <a:endParaRPr lang="en-US" sz="2850" dirty="0"/>
-          </a:p>
-        </p:txBody>
-      </p:sp>
-      <p:sp>
-        <p:nvSpPr>
-          <p:cNvPr id="18" name="Text 16"/>
-          <p:cNvSpPr/>
-          <p:nvPr/>
-        </p:nvSpPr>
-        <p:spPr>
-          <a:xfrm>
-            <a:off x="10134600" y="4268837"/>
-            <a:ext cx="438150" cy="508546"/>
-          </a:xfrm>
-          <a:prstGeom prst="rect">
-            <a:avLst/>
-          </a:prstGeom>
-          <a:noFill/>
-          <a:ln/>
-        </p:spPr>
-        <p:txBody>
-          <a:bodyPr wrap="square" lIns="25400" tIns="25400" rIns="25400" bIns="25400" rtlCol="0" anchor="t">
-            <a:normAutofit/>
-          </a:bodyPr>
-          <a:lstStyle/>
-          <a:p>
-            <a:pPr algn="l" indent="0" marL="0">
-              <a:lnSpc>
-                <a:spcPct val="109778"/>
-              </a:lnSpc>
-              <a:buNone/>
-            </a:pPr>
-            <a:r>
-              <a:rPr lang="en-US" sz="2850" dirty="0">
-                <a:solidFill>
-                  <a:srgbClr val="F499C6"/>
-                </a:solidFill>
-                <a:latin typeface="Helvetica Neue" pitchFamily="34" charset="0"/>
-                <a:ea typeface="Helvetica Neue" pitchFamily="34" charset="-122"/>
-                <a:cs typeface="Helvetica Neue" pitchFamily="34" charset="-120"/>
-              </a:rPr>
-              <a:t>—</a:t>
-            </a:r>
-            <a:endParaRPr lang="en-US" sz="2850" dirty="0"/>
-          </a:p>
-        </p:txBody>
-      </p:sp>
-      <p:sp>
-        <p:nvSpPr>
-          <p:cNvPr id="19" name="Text 17"/>
-          <p:cNvSpPr/>
-          <p:nvPr/>
-        </p:nvSpPr>
-        <p:spPr>
-          <a:xfrm>
-            <a:off x="10725150" y="4268837"/>
-            <a:ext cx="3636347" cy="508546"/>
-          </a:xfrm>
-          <a:prstGeom prst="rect">
-            <a:avLst/>
-          </a:prstGeom>
-          <a:noFill/>
-          <a:ln/>
-        </p:spPr>
-        <p:txBody>
-          <a:bodyPr wrap="square" lIns="25400" tIns="25400" rIns="25400" bIns="25400" rtlCol="0" anchor="t">
-            <a:normAutofit/>
-          </a:bodyPr>
-          <a:lstStyle/>
-          <a:p>
-            <a:pPr algn="l" indent="0" marL="0">
-              <a:lnSpc>
-                <a:spcPct val="109778"/>
-              </a:lnSpc>
-              <a:buNone/>
-            </a:pPr>
-            <a:r>
-              <a:rPr lang="en-US" sz="2850" dirty="0">
-                <a:solidFill>
-                  <a:srgbClr val="F2F4F4"/>
-                </a:solidFill>
-                <a:latin typeface="Helvetica Neue" pitchFamily="34" charset="0"/>
-                <a:ea typeface="Helvetica Neue" pitchFamily="34" charset="-122"/>
-                <a:cs typeface="Helvetica Neue" pitchFamily="34" charset="-120"/>
-              </a:rPr>
-              <a:t>An auto-apply mode</a:t>
-            </a:r>
-            <a:endParaRPr lang="en-US" sz="2850" dirty="0"/>
-          </a:p>
-        </p:txBody>
-      </p:sp>
-      <p:sp>
-        <p:nvSpPr>
-          <p:cNvPr id="20" name="Shape 18"/>
-          <p:cNvSpPr/>
-          <p:nvPr/>
-        </p:nvSpPr>
-        <p:spPr>
-          <a:xfrm>
-            <a:off x="10134600" y="8002042"/>
+          <p:cNvPr id="22" name="Shape 20"/>
+          <p:cNvSpPr/>
+          <p:nvPr/>
+        </p:nvSpPr>
+        <p:spPr>
+          <a:xfrm>
+            <a:off x="10134600" y="8001967"/>
             <a:ext cx="6629400" cy="19050"/>
           </a:xfrm>
           <a:prstGeom prst="rect">
@@ -5884,30 +5944,30 @@
       </p:sp>
       <p:sp>
         <p:nvSpPr>
-          <p:cNvPr id="21" name="Text 19"/>
-          <p:cNvSpPr/>
-          <p:nvPr/>
-        </p:nvSpPr>
-        <p:spPr>
-          <a:xfrm>
-            <a:off x="10134600" y="8325892"/>
-            <a:ext cx="6828282" cy="475208"/>
-          </a:xfrm>
-          <a:prstGeom prst="rect">
-            <a:avLst/>
-          </a:prstGeom>
-          <a:noFill/>
-          <a:ln/>
-        </p:spPr>
-        <p:txBody>
-          <a:bodyPr wrap="square" lIns="25400" tIns="25400" rIns="25400" bIns="25400" rtlCol="0" anchor="t">
-            <a:normAutofit/>
-          </a:bodyPr>
-          <a:lstStyle/>
-          <a:p>
-            <a:pPr algn="l" indent="0" marL="0">
-              <a:lnSpc>
-                <a:spcPct val="111951"/>
+          <p:cNvPr id="23" name="Text 21"/>
+          <p:cNvSpPr/>
+          <p:nvPr/>
+        </p:nvSpPr>
+        <p:spPr>
+          <a:xfrm>
+            <a:off x="10134600" y="8325817"/>
+            <a:ext cx="6828282" cy="475283"/>
+          </a:xfrm>
+          <a:prstGeom prst="rect">
+            <a:avLst/>
+          </a:prstGeom>
+          <a:noFill/>
+          <a:ln/>
+        </p:spPr>
+        <p:txBody>
+          <a:bodyPr wrap="square" lIns="25400" tIns="25400" rIns="25400" bIns="25400" rtlCol="0" anchor="t">
+            <a:normAutofit/>
+          </a:bodyPr>
+          <a:lstStyle/>
+          <a:p>
+            <a:pPr algn="l" indent="0" marL="0">
+              <a:lnSpc>
+                <a:spcPct val="110602"/>
               </a:lnSpc>
               <a:buNone/>
             </a:pPr>
